--- a/Test1_Apresentacao_SQL.pptx
+++ b/Test1_Apresentacao_SQL.pptx
@@ -4,6 +4,9 @@
   <p:sldMasterIdLst>
     <p:sldMasterId id="2147483648" r:id="rId1"/>
   </p:sldMasterIdLst>
+  <p:notesMasterIdLst>
+    <p:notesMasterId r:id="rId9"/>
+  </p:notesMasterIdLst>
   <p:sldIdLst>
     <p:sldId id="256" r:id="rId2"/>
     <p:sldId id="257" r:id="rId3"/>
@@ -13,10 +16,7 @@
     <p:sldId id="261" r:id="rId7"/>
     <p:sldId id="262" r:id="rId8"/>
   </p:sldIdLst>
-  <p:notesMasterIdLst>
-    <p:notesMasterId r:id="rId9"/>
-  </p:notesMasterIdLst>
-  <p:sldSz cx="9144000" cy="5143500"/>
+  <p:sldSz cx="9144000" cy="5143500" type="screen16x9"/>
   <p:notesSz cx="5143500" cy="9144000"/>
   <p:defaultTextStyle>
     <a:lvl1pPr marL="0" algn="l" defTabSz="914400" rtl="0" eaLnBrk="1" latinLnBrk="0" hangingPunct="1">
@@ -110,6 +110,11 @@
       </a:defRPr>
     </a:lvl9pPr>
   </p:defaultTextStyle>
+  <p:extLst>
+    <p:ext uri="{EFAFB233-063F-42B5-8137-9DF3F51BA10A}">
+      <p15:sldGuideLst xmlns:p15="http://schemas.microsoft.com/office/powerpoint/2012/main"/>
+    </p:ext>
+  </p:extLst>
 </p:presentation>
 </file>
 
@@ -135,234 +140,10 @@
           <a:chExt cx="0" cy="0"/>
         </a:xfrm>
       </p:grpSpPr>
-      <p:sp>
-        <p:nvSpPr>
-          <p:cNvPr id="2" name="Header Placeholder 1"/>
-          <p:cNvSpPr>
-            <a:spLocks noGrp="1"/>
-          </p:cNvSpPr>
-          <p:nvPr>
-            <p:ph type="hdr" sz="quarter"/>
-          </p:nvPr>
-        </p:nvSpPr>
-        <p:spPr>
-          <a:xfrm>
-            <a:off x="0" y="0"/>
-            <a:ext cx="2971800" cy="458788"/>
-          </a:xfrm>
-          <a:prstGeom prst="rect">
-            <a:avLst/>
-          </a:prstGeom>
-        </p:spPr>
-        <p:txBody>
-          <a:bodyPr vert="horz" lIns="91440" tIns="45720" rIns="91440" bIns="45720" rtlCol="0"/>
-          <a:lstStyle>
-            <a:lvl1pPr algn="l">
-              <a:defRPr sz="1200"/>
-            </a:lvl1pPr>
-          </a:lstStyle>
-          <a:p>
-            <a:endParaRPr lang="en-US"/>
-          </a:p>
-        </p:txBody>
-      </p:sp>
-      <p:sp>
-        <p:nvSpPr>
-          <p:cNvPr id="3" name="Date Placeholder 2"/>
-          <p:cNvSpPr>
-            <a:spLocks noGrp="1"/>
-          </p:cNvSpPr>
-          <p:nvPr>
-            <p:ph type="dt" idx="1"/>
-          </p:nvPr>
-        </p:nvSpPr>
-        <p:spPr>
-          <a:xfrm>
-            <a:off x="3884613" y="0"/>
-            <a:ext cx="2971800" cy="458788"/>
-          </a:xfrm>
-          <a:prstGeom prst="rect">
-            <a:avLst/>
-          </a:prstGeom>
-        </p:spPr>
-        <p:txBody>
-          <a:bodyPr vert="horz" lIns="91440" tIns="45720" rIns="91440" bIns="45720" rtlCol="0"/>
-          <a:lstStyle>
-            <a:lvl1pPr algn="r">
-              <a:defRPr sz="1200"/>
-            </a:lvl1pPr>
-          </a:lstStyle>
-          <a:p>
-            <a:fld id="{5282F153-3F37-0F45-9E97-73ACFA13230C}" type="datetimeFigureOut">
-              <a:rPr lang="en-US"/>
-              <a:t>7/23/19</a:t>
-            </a:fld>
-            <a:endParaRPr lang="en-US"/>
-          </a:p>
-        </p:txBody>
-      </p:sp>
-      <p:sp>
-        <p:nvSpPr>
-          <p:cNvPr id="4" name="Slide Image Placeholder 3"/>
-          <p:cNvSpPr>
-            <a:spLocks noGrp="1" noRot="1" noChangeAspect="1"/>
-          </p:cNvSpPr>
-          <p:nvPr>
-            <p:ph type="sldImg" idx="2"/>
-          </p:nvPr>
-        </p:nvSpPr>
-        <p:spPr>
-          <a:xfrm>
-            <a:off x="685800" y="1143000"/>
-            <a:ext cx="5486400" cy="3086100"/>
-          </a:xfrm>
-          <a:prstGeom prst="rect">
-            <a:avLst/>
-          </a:prstGeom>
-          <a:noFill/>
-          <a:ln w="12700">
-            <a:solidFill>
-              <a:prstClr val="black"/>
-            </a:solidFill>
-          </a:ln>
-        </p:spPr>
-        <p:txBody>
-          <a:bodyPr vert="horz" lIns="91440" tIns="45720" rIns="91440" bIns="45720" rtlCol="0" anchor="ctr"/>
-          <a:lstStyle/>
-          <a:p>
-            <a:endParaRPr lang="en-US"/>
-          </a:p>
-        </p:txBody>
-      </p:sp>
-      <p:sp>
-        <p:nvSpPr>
-          <p:cNvPr id="5" name="Notes Placeholder 4"/>
-          <p:cNvSpPr>
-            <a:spLocks noGrp="1"/>
-          </p:cNvSpPr>
-          <p:nvPr>
-            <p:ph type="body" sz="quarter" idx="3"/>
-          </p:nvPr>
-        </p:nvSpPr>
-        <p:spPr>
-          <a:xfrm>
-            <a:off x="685800" y="4400550"/>
-            <a:ext cx="5486400" cy="3600450"/>
-          </a:xfrm>
-          <a:prstGeom prst="rect">
-            <a:avLst/>
-          </a:prstGeom>
-        </p:spPr>
-        <p:txBody>
-          <a:bodyPr vert="horz" lIns="91440" tIns="45720" rIns="91440" bIns="45720" rtlCol="0"/>
-          <a:lstStyle/>
-          <a:p>
-            <a:pPr lvl="0"/>
-            <a:r>
-              <a:rPr lang="en-US"/>
-              <a:t>Click to edit Master text styles</a:t>
-            </a:r>
-          </a:p>
-          <a:p>
-            <a:pPr lvl="1"/>
-            <a:r>
-              <a:rPr lang="en-US"/>
-              <a:t>Second level</a:t>
-            </a:r>
-          </a:p>
-          <a:p>
-            <a:pPr lvl="2"/>
-            <a:r>
-              <a:rPr lang="en-US"/>
-              <a:t>Third level</a:t>
-            </a:r>
-          </a:p>
-          <a:p>
-            <a:pPr lvl="3"/>
-            <a:r>
-              <a:rPr lang="en-US"/>
-              <a:t>Fourth level</a:t>
-            </a:r>
-          </a:p>
-          <a:p>
-            <a:pPr lvl="4"/>
-            <a:r>
-              <a:rPr lang="en-US"/>
-              <a:t>Fifth level</a:t>
-            </a:r>
-          </a:p>
-        </p:txBody>
-      </p:sp>
-      <p:sp>
-        <p:nvSpPr>
-          <p:cNvPr id="6" name="Footer Placeholder 5"/>
-          <p:cNvSpPr>
-            <a:spLocks noGrp="1"/>
-          </p:cNvSpPr>
-          <p:nvPr>
-            <p:ph type="ftr" sz="quarter" idx="4"/>
-          </p:nvPr>
-        </p:nvSpPr>
-        <p:spPr>
-          <a:xfrm>
-            <a:off x="0" y="8685213"/>
-            <a:ext cx="2971800" cy="458787"/>
-          </a:xfrm>
-          <a:prstGeom prst="rect">
-            <a:avLst/>
-          </a:prstGeom>
-        </p:spPr>
-        <p:txBody>
-          <a:bodyPr vert="horz" lIns="91440" tIns="45720" rIns="91440" bIns="45720" rtlCol="0" anchor="b"/>
-          <a:lstStyle>
-            <a:lvl1pPr algn="l">
-              <a:defRPr sz="1200"/>
-            </a:lvl1pPr>
-          </a:lstStyle>
-          <a:p>
-            <a:endParaRPr lang="en-US"/>
-          </a:p>
-        </p:txBody>
-      </p:sp>
-      <p:sp>
-        <p:nvSpPr>
-          <p:cNvPr id="7" name="Slide Number Placeholder 6"/>
-          <p:cNvSpPr>
-            <a:spLocks noGrp="1"/>
-          </p:cNvSpPr>
-          <p:nvPr>
-            <p:ph type="sldNum" sz="quarter" idx="5"/>
-          </p:nvPr>
-        </p:nvSpPr>
-        <p:spPr>
-          <a:xfrm>
-            <a:off x="3884613" y="8685213"/>
-            <a:ext cx="2971800" cy="458787"/>
-          </a:xfrm>
-          <a:prstGeom prst="rect">
-            <a:avLst/>
-          </a:prstGeom>
-        </p:spPr>
-        <p:txBody>
-          <a:bodyPr vert="horz" lIns="91440" tIns="45720" rIns="91440" bIns="45720" rtlCol="0" anchor="b"/>
-          <a:lstStyle>
-            <a:lvl1pPr algn="r">
-              <a:defRPr sz="1200"/>
-            </a:lvl1pPr>
-          </a:lstStyle>
-          <a:p>
-            <a:fld id="{CE5E9CC1-C706-0F49-92D6-E571CC5EEA8F}" type="slidenum">
-              <a:rPr lang="en-US"/>
-              <a:t>‹#›</a:t>
-            </a:fld>
-            <a:endParaRPr lang="en-US"/>
-          </a:p>
-        </p:txBody>
-      </p:sp>
     </p:spTree>
     <p:extLst>
       <p:ext uri="{BB962C8B-B14F-4D97-AF65-F5344CB8AC3E}">
-        <p14:creationId xmlns:p14="http://schemas.microsoft.com/office/powerpoint/2010/main" val="1024086991"/>
+        <p14:creationId xmlns:p14="http://schemas.microsoft.com/office/powerpoint/2010/main" val="1679248779"/>
       </p:ext>
     </p:extLst>
   </p:cSld>
@@ -506,10 +287,6 @@
           <a:bodyPr/>
           <a:lstStyle/>
           <a:p>
-            <a:r>
-              <a:rPr lang="en-US" dirty="0"/>
-              <a:t/>
-            </a:r>
             <a:endParaRPr lang="en-US" dirty="0"/>
           </a:p>
         </p:txBody>
@@ -594,10 +371,6 @@
           <a:bodyPr/>
           <a:lstStyle/>
           <a:p>
-            <a:r>
-              <a:rPr lang="en-US" dirty="0"/>
-              <a:t/>
-            </a:r>
             <a:endParaRPr lang="en-US" dirty="0"/>
           </a:p>
         </p:txBody>
@@ -682,10 +455,6 @@
           <a:bodyPr/>
           <a:lstStyle/>
           <a:p>
-            <a:r>
-              <a:rPr lang="en-US" dirty="0"/>
-              <a:t/>
-            </a:r>
             <a:endParaRPr lang="en-US" dirty="0"/>
           </a:p>
         </p:txBody>
@@ -770,10 +539,6 @@
           <a:bodyPr/>
           <a:lstStyle/>
           <a:p>
-            <a:r>
-              <a:rPr lang="en-US" dirty="0"/>
-              <a:t/>
-            </a:r>
             <a:endParaRPr lang="en-US" dirty="0"/>
           </a:p>
         </p:txBody>
@@ -858,10 +623,6 @@
           <a:bodyPr/>
           <a:lstStyle/>
           <a:p>
-            <a:r>
-              <a:rPr lang="en-US" dirty="0"/>
-              <a:t/>
-            </a:r>
             <a:endParaRPr lang="en-US" dirty="0"/>
           </a:p>
         </p:txBody>
@@ -946,10 +707,6 @@
           <a:bodyPr/>
           <a:lstStyle/>
           <a:p>
-            <a:r>
-              <a:rPr lang="en-US" dirty="0"/>
-              <a:t/>
-            </a:r>
             <a:endParaRPr lang="en-US" dirty="0"/>
           </a:p>
         </p:txBody>
@@ -1034,10 +791,6 @@
           <a:bodyPr/>
           <a:lstStyle/>
           <a:p>
-            <a:r>
-              <a:rPr lang="en-US" dirty="0"/>
-              <a:t/>
-            </a:r>
             <a:endParaRPr lang="en-US" dirty="0"/>
           </a:p>
         </p:txBody>
@@ -1111,6 +864,11 @@
 <file path=ppt/slideMasters/slideMaster1.xml><?xml version="1.0" encoding="utf-8"?>
 <p:sldMaster xmlns:a="http://schemas.openxmlformats.org/drawingml/2006/main" xmlns:r="http://schemas.openxmlformats.org/officeDocument/2006/relationships" xmlns:p="http://schemas.openxmlformats.org/presentationml/2006/main">
   <p:cSld>
+    <p:bg>
+      <p:bgRef idx="1001">
+        <a:schemeClr val="bg1"/>
+      </p:bgRef>
+    </p:bg>
     <p:spTree>
       <p:nvGrpSpPr>
         <p:cNvPr id="1" name=""/>
@@ -1393,6 +1151,7 @@
         <a:solidFill>
           <a:srgbClr val="1F2A44"/>
         </a:solidFill>
+        <a:effectLst/>
       </p:bgPr>
     </p:bg>
     <p:spTree>
@@ -1430,7 +1189,7 @@
           <a:bodyPr wrap="square" lIns="0" tIns="0" rIns="0" bIns="0" rtlCol="0" anchor="ctr"/>
           <a:lstStyle/>
           <a:p>
-            <a:pPr indent="0" marL="0">
+            <a:pPr marL="0" indent="0">
               <a:buNone/>
             </a:pPr>
             <a:r>
@@ -1447,7 +1206,7 @@
             <a:endParaRPr lang="en-US" sz="3200" dirty="0"/>
           </a:p>
           <a:p>
-            <a:pPr indent="0" marL="0">
+            <a:pPr marL="0" indent="0">
               <a:buNone/>
             </a:pPr>
             <a:r>
@@ -1486,7 +1245,7 @@
           <a:bodyPr wrap="square" lIns="0" tIns="0" rIns="0" bIns="0" rtlCol="0" anchor="ctr"/>
           <a:lstStyle/>
           <a:p>
-            <a:pPr indent="0" marL="0">
+            <a:pPr marL="0" indent="0">
               <a:buNone/>
             </a:pPr>
             <a:r>
@@ -1498,7 +1257,29 @@
                 <a:ea typeface="Arial" pitchFamily="34" charset="-122"/>
                 <a:cs typeface="Arial" pitchFamily="34" charset="-120"/>
               </a:rPr>
-              <a:t>SQL Server (T-SQL) · Banco PJ (futebol) · 23 erros encontrados e corrigidos</a:t>
+              <a:t>SQL Server · Banco PJ (futebol) · </a:t>
+            </a:r>
+            <a:r>
+              <a:rPr lang="en-US" sz="1400" dirty="0" err="1">
+                <a:solidFill>
+                  <a:srgbClr val="C9D3EA"/>
+                </a:solidFill>
+                <a:latin typeface="Arial" pitchFamily="34" charset="0"/>
+                <a:ea typeface="Arial" pitchFamily="34" charset="-122"/>
+                <a:cs typeface="Arial" pitchFamily="34" charset="-120"/>
+              </a:rPr>
+              <a:t>Erros</a:t>
+            </a:r>
+            <a:r>
+              <a:rPr lang="en-US" sz="1400" dirty="0">
+                <a:solidFill>
+                  <a:srgbClr val="C9D3EA"/>
+                </a:solidFill>
+                <a:latin typeface="Arial" pitchFamily="34" charset="0"/>
+                <a:ea typeface="Arial" pitchFamily="34" charset="-122"/>
+                <a:cs typeface="Arial" pitchFamily="34" charset="-120"/>
+              </a:rPr>
+              <a:t> encontrados e corrigidos</a:t>
             </a:r>
             <a:endParaRPr lang="en-US" sz="1400" dirty="0"/>
           </a:p>
@@ -1527,7 +1308,7 @@
           <a:bodyPr wrap="square" rtlCol="0" anchor="ctr"/>
           <a:lstStyle/>
           <a:p>
-            <a:pPr algn="ctr" indent="0" marL="0">
+            <a:pPr marL="0" indent="0" algn="ctr">
               <a:buNone/>
             </a:pPr>
             <a:r>
@@ -1566,7 +1347,7 @@
           <a:bodyPr wrap="square" lIns="0" tIns="0" rIns="0" bIns="0" rtlCol="0" anchor="ctr"/>
           <a:lstStyle/>
           <a:p>
-            <a:pPr indent="0" marL="0">
+            <a:pPr marL="0" indent="0">
               <a:buNone/>
             </a:pPr>
             <a:r>
@@ -1607,7 +1388,7 @@
           <a:bodyPr wrap="square" rtlCol="0" anchor="ctr"/>
           <a:lstStyle/>
           <a:p>
-            <a:pPr algn="ctr" indent="0" marL="0">
+            <a:pPr marL="0" indent="0" algn="ctr">
               <a:buNone/>
             </a:pPr>
             <a:r>
@@ -1646,7 +1427,7 @@
           <a:bodyPr wrap="square" lIns="0" tIns="0" rIns="0" bIns="0" rtlCol="0" anchor="ctr"/>
           <a:lstStyle/>
           <a:p>
-            <a:pPr indent="0" marL="0">
+            <a:pPr marL="0" indent="0">
               <a:buNone/>
             </a:pPr>
             <a:r>
@@ -1687,7 +1468,7 @@
           <a:bodyPr wrap="square" rtlCol="0" anchor="ctr"/>
           <a:lstStyle/>
           <a:p>
-            <a:pPr algn="ctr" indent="0" marL="0">
+            <a:pPr marL="0" indent="0" algn="ctr">
               <a:buNone/>
             </a:pPr>
             <a:r>
@@ -1726,7 +1507,7 @@
           <a:bodyPr wrap="square" lIns="0" tIns="0" rIns="0" bIns="0" rtlCol="0" anchor="ctr"/>
           <a:lstStyle/>
           <a:p>
-            <a:pPr indent="0" marL="0">
+            <a:pPr marL="0" indent="0">
               <a:buNone/>
             </a:pPr>
             <a:r>
@@ -1767,7 +1548,7 @@
           <a:bodyPr wrap="square" rtlCol="0" anchor="ctr"/>
           <a:lstStyle/>
           <a:p>
-            <a:pPr algn="ctr" indent="0" marL="0">
+            <a:pPr marL="0" indent="0" algn="ctr">
               <a:buNone/>
             </a:pPr>
             <a:r>
@@ -1806,7 +1587,7 @@
           <a:bodyPr wrap="square" lIns="0" tIns="0" rIns="0" bIns="0" rtlCol="0" anchor="ctr"/>
           <a:lstStyle/>
           <a:p>
-            <a:pPr indent="0" marL="0">
+            <a:pPr marL="0" indent="0">
               <a:buNone/>
             </a:pPr>
             <a:r>
@@ -1847,7 +1628,7 @@
           <a:bodyPr wrap="square" rtlCol="0" anchor="ctr"/>
           <a:lstStyle/>
           <a:p>
-            <a:pPr algn="ctr" indent="0" marL="0">
+            <a:pPr marL="0" indent="0" algn="ctr">
               <a:buNone/>
             </a:pPr>
             <a:r>
@@ -1886,7 +1667,7 @@
           <a:bodyPr wrap="square" lIns="0" tIns="0" rIns="0" bIns="0" rtlCol="0" anchor="ctr"/>
           <a:lstStyle/>
           <a:p>
-            <a:pPr indent="0" marL="0">
+            <a:pPr marL="0" indent="0">
               <a:buNone/>
             </a:pPr>
             <a:r>
@@ -1920,6 +1701,7 @@
         <a:solidFill>
           <a:srgbClr val="FFFFFF"/>
         </a:solidFill>
+        <a:effectLst/>
       </p:bgPr>
     </p:bg>
     <p:spTree>
@@ -1957,7 +1739,7 @@
           <a:bodyPr wrap="square" lIns="0" tIns="0" rIns="0" bIns="0" rtlCol="0" anchor="ctr"/>
           <a:lstStyle/>
           <a:p>
-            <a:pPr indent="0" marL="0">
+            <a:pPr marL="0" indent="0">
               <a:buNone/>
             </a:pPr>
             <a:r>
@@ -1998,7 +1780,7 @@
           <a:bodyPr wrap="square" rtlCol="0" anchor="ctr"/>
           <a:lstStyle/>
           <a:p>
-            <a:pPr algn="ctr" indent="0" marL="0">
+            <a:pPr marL="0" indent="0" algn="ctr">
               <a:buNone/>
             </a:pPr>
             <a:r>
@@ -2018,30 +1800,48 @@
       </p:sp>
       <p:graphicFrame>
         <p:nvGraphicFramePr>
-          <p:cNvPr id="3" name="Table 0"/>
+          <p:cNvPr id="4" name="Table 0"/>
           <p:cNvGraphicFramePr>
             <a:graphicFrameLocks noGrp="1"/>
           </p:cNvGraphicFramePr>
           <p:nvPr>
             <p:extLst>
               <p:ext uri="{D42A27DB-BD31-4B8C-83A1-F6EECF244321}">
-                <p14:modId xmlns:p14="http://schemas.microsoft.com/office/powerpoint/2010/main" val="1579011935"/>
+                <p14:modId xmlns:p14="http://schemas.microsoft.com/office/powerpoint/2010/main" val="3782852201"/>
               </p:ext>
             </p:extLst>
           </p:nvPr>
         </p:nvGraphicFramePr>
         <p:xfrm>
           <a:off x="457200" y="1051560"/>
-          <a:ext cx="8229600" cy="914400"/>
+          <a:ext cx="8229600" cy="4023360"/>
         </p:xfrm>
         <a:graphic>
           <a:graphicData uri="http://schemas.openxmlformats.org/drawingml/2006/table">
             <a:tbl>
               <a:tblPr/>
               <a:tblGrid>
-                <a:gridCol w="2743200"/>
-                <a:gridCol w="2834640"/>
-                <a:gridCol w="2651760"/>
+                <a:gridCol w="2743200">
+                  <a:extLst>
+                    <a:ext uri="{9D8B030D-6E8A-4147-A177-3AD203B41FA5}">
+                      <a16:colId xmlns:a16="http://schemas.microsoft.com/office/drawing/2014/main" val="20000"/>
+                    </a:ext>
+                  </a:extLst>
+                </a:gridCol>
+                <a:gridCol w="2834640">
+                  <a:extLst>
+                    <a:ext uri="{9D8B030D-6E8A-4147-A177-3AD203B41FA5}">
+                      <a16:colId xmlns:a16="http://schemas.microsoft.com/office/drawing/2014/main" val="20001"/>
+                    </a:ext>
+                  </a:extLst>
+                </a:gridCol>
+                <a:gridCol w="2651760">
+                  <a:extLst>
+                    <a:ext uri="{9D8B030D-6E8A-4147-A177-3AD203B41FA5}">
+                      <a16:colId xmlns:a16="http://schemas.microsoft.com/office/drawing/2014/main" val="20002"/>
+                    </a:ext>
+                  </a:extLst>
+                </a:gridCol>
               </a:tblGrid>
               <a:tr h="502920">
                 <a:tc>
@@ -2049,7 +1849,7 @@
                     <a:bodyPr/>
                     <a:lstStyle/>
                     <a:p>
-                      <a:pPr indent="0" marL="0">
+                      <a:pPr marL="0" indent="0">
                         <a:buNone/>
                       </a:pPr>
                       <a:r>
@@ -2070,7 +1870,7 @@
                       </a:endParaRPr>
                     </a:p>
                   </a:txBody>
-                  <a:tcPr marL="91440" marR="91440" marT="45720" marB="45720">
+                  <a:tcPr>
                     <a:lnL w="9525" cap="flat" cmpd="sng" algn="ctr">
                       <a:solidFill>
                         <a:srgbClr val="D5D9E0"/>
@@ -2117,7 +1917,7 @@
                     <a:bodyPr/>
                     <a:lstStyle/>
                     <a:p>
-                      <a:pPr indent="0" marL="0">
+                      <a:pPr marL="0" indent="0">
                         <a:buNone/>
                       </a:pPr>
                       <a:r>
@@ -2138,7 +1938,7 @@
                       </a:endParaRPr>
                     </a:p>
                   </a:txBody>
-                  <a:tcPr marL="91440" marR="91440" marT="45720" marB="45720">
+                  <a:tcPr>
                     <a:lnL w="9525" cap="flat" cmpd="sng" algn="ctr">
                       <a:solidFill>
                         <a:srgbClr val="D5D9E0"/>
@@ -2185,7 +1985,7 @@
                     <a:bodyPr/>
                     <a:lstStyle/>
                     <a:p>
-                      <a:pPr indent="0" marL="0">
+                      <a:pPr marL="0" indent="0">
                         <a:buNone/>
                       </a:pPr>
                       <a:r>
@@ -2206,7 +2006,7 @@
                       </a:endParaRPr>
                     </a:p>
                   </a:txBody>
-                  <a:tcPr marL="91440" marR="91440" marT="45720" marB="45720">
+                  <a:tcPr>
                     <a:lnL w="9525" cap="flat" cmpd="sng" algn="ctr">
                       <a:solidFill>
                         <a:srgbClr val="D5D9E0"/>
@@ -2248,6 +2048,11 @@
                     </a:solidFill>
                   </a:tcPr>
                 </a:tc>
+                <a:extLst>
+                  <a:ext uri="{0D108BD9-81ED-4DB2-BD59-A6C34878D82A}">
+                    <a16:rowId xmlns:a16="http://schemas.microsoft.com/office/drawing/2014/main" val="10000"/>
+                  </a:ext>
+                </a:extLst>
               </a:tr>
               <a:tr h="502920">
                 <a:tc>
@@ -2255,7 +2060,7 @@
                     <a:bodyPr/>
                     <a:lstStyle/>
                     <a:p>
-                      <a:pPr indent="0" marL="0">
+                      <a:pPr marL="0" indent="0">
                         <a:buNone/>
                       </a:pPr>
                       <a:r>
@@ -2276,7 +2081,7 @@
                       </a:endParaRPr>
                     </a:p>
                   </a:txBody>
-                  <a:tcPr marL="91440" marR="91440" marT="45720" marB="45720" anchor="ctr">
+                  <a:tcPr anchor="ctr">
                     <a:lnL w="9525" cap="flat" cmpd="sng" algn="ctr">
                       <a:solidFill>
                         <a:srgbClr val="D5D9E0"/>
@@ -2323,7 +2128,7 @@
                     <a:bodyPr/>
                     <a:lstStyle/>
                     <a:p>
-                      <a:pPr indent="0" marL="0">
+                      <a:pPr marL="0" indent="0">
                         <a:buNone/>
                       </a:pPr>
                       <a:r>
@@ -2344,7 +2149,7 @@
                       </a:endParaRPr>
                     </a:p>
                   </a:txBody>
-                  <a:tcPr marL="91440" marR="91440" marT="45720" marB="45720" anchor="ctr">
+                  <a:tcPr anchor="ctr">
                     <a:lnL w="9525" cap="flat" cmpd="sng" algn="ctr">
                       <a:solidFill>
                         <a:srgbClr val="D5D9E0"/>
@@ -2391,7 +2196,7 @@
                     <a:bodyPr/>
                     <a:lstStyle/>
                     <a:p>
-                      <a:pPr indent="0" marL="0">
+                      <a:pPr marL="0" indent="0">
                         <a:buNone/>
                       </a:pPr>
                       <a:r>
@@ -2403,7 +2208,62 @@
                           <a:ea typeface="Arial" pitchFamily="34" charset="-122"/>
                           <a:cs typeface="Arial" pitchFamily="34" charset="-120"/>
                         </a:rPr>
-                        <a:t>Criação do banco estava comentada</a:t>
+                        <a:t>Criação do banco </a:t>
+                      </a:r>
+                      <a:r>
+                        <a:rPr lang="en-US" sz="1100" dirty="0" err="1">
+                          <a:solidFill>
+                            <a:srgbClr val="222222"/>
+                          </a:solidFill>
+                          <a:latin typeface="Arial" pitchFamily="34" charset="0"/>
+                          <a:ea typeface="Arial" pitchFamily="34" charset="-122"/>
+                          <a:cs typeface="Arial" pitchFamily="34" charset="-120"/>
+                        </a:rPr>
+                        <a:t>estava</a:t>
+                      </a:r>
+                      <a:r>
+                        <a:rPr lang="en-US" sz="1100" dirty="0">
+                          <a:solidFill>
+                            <a:srgbClr val="222222"/>
+                          </a:solidFill>
+                          <a:latin typeface="Arial" pitchFamily="34" charset="0"/>
+                          <a:ea typeface="Arial" pitchFamily="34" charset="-122"/>
+                          <a:cs typeface="Arial" pitchFamily="34" charset="-120"/>
+                        </a:rPr>
+                        <a:t> </a:t>
+                      </a:r>
+                      <a:r>
+                        <a:rPr lang="en-US" sz="1100" dirty="0" err="1">
+                          <a:solidFill>
+                            <a:srgbClr val="222222"/>
+                          </a:solidFill>
+                          <a:latin typeface="Arial" pitchFamily="34" charset="0"/>
+                          <a:ea typeface="Arial" pitchFamily="34" charset="-122"/>
+                          <a:cs typeface="Arial" pitchFamily="34" charset="-120"/>
+                        </a:rPr>
+                        <a:t>como</a:t>
+                      </a:r>
+                      <a:r>
+                        <a:rPr lang="en-US" sz="1100" dirty="0">
+                          <a:solidFill>
+                            <a:srgbClr val="222222"/>
+                          </a:solidFill>
+                          <a:latin typeface="Arial" pitchFamily="34" charset="0"/>
+                          <a:ea typeface="Arial" pitchFamily="34" charset="-122"/>
+                          <a:cs typeface="Arial" pitchFamily="34" charset="-120"/>
+                        </a:rPr>
+                        <a:t> </a:t>
+                      </a:r>
+                      <a:r>
+                        <a:rPr lang="en-US" sz="1100" dirty="0" err="1">
+                          <a:solidFill>
+                            <a:srgbClr val="222222"/>
+                          </a:solidFill>
+                          <a:latin typeface="Arial" pitchFamily="34" charset="0"/>
+                          <a:ea typeface="Arial" pitchFamily="34" charset="-122"/>
+                          <a:cs typeface="Arial" pitchFamily="34" charset="-120"/>
+                        </a:rPr>
+                        <a:t>comentário</a:t>
                       </a:r>
                       <a:endParaRPr lang="en-US" sz="1100" dirty="0">
                         <a:latin typeface="Arial" charset="0"/>
@@ -2412,7 +2272,7 @@
                       </a:endParaRPr>
                     </a:p>
                   </a:txBody>
-                  <a:tcPr marL="91440" marR="91440" marT="45720" marB="45720" anchor="ctr">
+                  <a:tcPr anchor="ctr">
                     <a:lnL w="9525" cap="flat" cmpd="sng" algn="ctr">
                       <a:solidFill>
                         <a:srgbClr val="D5D9E0"/>
@@ -2451,6 +2311,11 @@
                     </a:lnB>
                   </a:tcPr>
                 </a:tc>
+                <a:extLst>
+                  <a:ext uri="{0D108BD9-81ED-4DB2-BD59-A6C34878D82A}">
+                    <a16:rowId xmlns:a16="http://schemas.microsoft.com/office/drawing/2014/main" val="10001"/>
+                  </a:ext>
+                </a:extLst>
               </a:tr>
               <a:tr h="502920">
                 <a:tc>
@@ -2458,7 +2323,7 @@
                     <a:bodyPr/>
                     <a:lstStyle/>
                     <a:p>
-                      <a:pPr indent="0" marL="0">
+                      <a:pPr marL="0" indent="0">
                         <a:buNone/>
                       </a:pPr>
                       <a:r>
@@ -2479,7 +2344,7 @@
                       </a:endParaRPr>
                     </a:p>
                   </a:txBody>
-                  <a:tcPr marL="91440" marR="91440" marT="45720" marB="45720" anchor="ctr">
+                  <a:tcPr anchor="ctr">
                     <a:lnL w="9525" cap="flat" cmpd="sng" algn="ctr">
                       <a:solidFill>
                         <a:srgbClr val="D5D9E0"/>
@@ -2526,7 +2391,7 @@
                     <a:bodyPr/>
                     <a:lstStyle/>
                     <a:p>
-                      <a:pPr indent="0" marL="0">
+                      <a:pPr marL="0" indent="0">
                         <a:buNone/>
                       </a:pPr>
                       <a:r>
@@ -2547,7 +2412,7 @@
                       </a:endParaRPr>
                     </a:p>
                   </a:txBody>
-                  <a:tcPr marL="91440" marR="91440" marT="45720" marB="45720" anchor="ctr">
+                  <a:tcPr anchor="ctr">
                     <a:lnL w="9525" cap="flat" cmpd="sng" algn="ctr">
                       <a:solidFill>
                         <a:srgbClr val="D5D9E0"/>
@@ -2594,7 +2459,7 @@
                     <a:bodyPr/>
                     <a:lstStyle/>
                     <a:p>
-                      <a:pPr indent="0" marL="0">
+                      <a:pPr marL="0" indent="0">
                         <a:buNone/>
                       </a:pPr>
                       <a:r>
@@ -2615,7 +2480,7 @@
                       </a:endParaRPr>
                     </a:p>
                   </a:txBody>
-                  <a:tcPr marL="91440" marR="91440" marT="45720" marB="45720" anchor="ctr">
+                  <a:tcPr anchor="ctr">
                     <a:lnL w="9525" cap="flat" cmpd="sng" algn="ctr">
                       <a:solidFill>
                         <a:srgbClr val="D5D9E0"/>
@@ -2654,6 +2519,11 @@
                     </a:lnB>
                   </a:tcPr>
                 </a:tc>
+                <a:extLst>
+                  <a:ext uri="{0D108BD9-81ED-4DB2-BD59-A6C34878D82A}">
+                    <a16:rowId xmlns:a16="http://schemas.microsoft.com/office/drawing/2014/main" val="10002"/>
+                  </a:ext>
+                </a:extLst>
               </a:tr>
               <a:tr h="502920">
                 <a:tc>
@@ -2661,7 +2531,7 @@
                     <a:bodyPr/>
                     <a:lstStyle/>
                     <a:p>
-                      <a:pPr indent="0" marL="0">
+                      <a:pPr marL="0" indent="0">
                         <a:buNone/>
                       </a:pPr>
                       <a:r>
@@ -2682,7 +2552,7 @@
                       </a:endParaRPr>
                     </a:p>
                   </a:txBody>
-                  <a:tcPr marL="91440" marR="91440" marT="45720" marB="45720" anchor="ctr">
+                  <a:tcPr anchor="ctr">
                     <a:lnL w="9525" cap="flat" cmpd="sng" algn="ctr">
                       <a:solidFill>
                         <a:srgbClr val="D5D9E0"/>
@@ -2729,7 +2599,7 @@
                     <a:bodyPr/>
                     <a:lstStyle/>
                     <a:p>
-                      <a:pPr indent="0" marL="0">
+                      <a:pPr marL="0" indent="0">
                         <a:buNone/>
                       </a:pPr>
                       <a:r>
@@ -2750,7 +2620,7 @@
                       </a:endParaRPr>
                     </a:p>
                   </a:txBody>
-                  <a:tcPr marL="91440" marR="91440" marT="45720" marB="45720" anchor="ctr">
+                  <a:tcPr anchor="ctr">
                     <a:lnL w="9525" cap="flat" cmpd="sng" algn="ctr">
                       <a:solidFill>
                         <a:srgbClr val="D5D9E0"/>
@@ -2797,7 +2667,7 @@
                     <a:bodyPr/>
                     <a:lstStyle/>
                     <a:p>
-                      <a:pPr indent="0" marL="0">
+                      <a:pPr marL="0" indent="0">
                         <a:buNone/>
                       </a:pPr>
                       <a:r>
@@ -2818,7 +2688,7 @@
                       </a:endParaRPr>
                     </a:p>
                   </a:txBody>
-                  <a:tcPr marL="91440" marR="91440" marT="45720" marB="45720" anchor="ctr">
+                  <a:tcPr anchor="ctr">
                     <a:lnL w="9525" cap="flat" cmpd="sng" algn="ctr">
                       <a:solidFill>
                         <a:srgbClr val="D5D9E0"/>
@@ -2857,6 +2727,11 @@
                     </a:lnB>
                   </a:tcPr>
                 </a:tc>
+                <a:extLst>
+                  <a:ext uri="{0D108BD9-81ED-4DB2-BD59-A6C34878D82A}">
+                    <a16:rowId xmlns:a16="http://schemas.microsoft.com/office/drawing/2014/main" val="10003"/>
+                  </a:ext>
+                </a:extLst>
               </a:tr>
               <a:tr h="502920">
                 <a:tc>
@@ -2864,7 +2739,7 @@
                     <a:bodyPr/>
                     <a:lstStyle/>
                     <a:p>
-                      <a:pPr indent="0" marL="0">
+                      <a:pPr marL="0" indent="0">
                         <a:buNone/>
                       </a:pPr>
                       <a:r>
@@ -2885,7 +2760,7 @@
                       </a:endParaRPr>
                     </a:p>
                   </a:txBody>
-                  <a:tcPr marL="91440" marR="91440" marT="45720" marB="45720" anchor="ctr">
+                  <a:tcPr anchor="ctr">
                     <a:lnL w="9525" cap="flat" cmpd="sng" algn="ctr">
                       <a:solidFill>
                         <a:srgbClr val="D5D9E0"/>
@@ -2932,7 +2807,7 @@
                     <a:bodyPr/>
                     <a:lstStyle/>
                     <a:p>
-                      <a:pPr indent="0" marL="0">
+                      <a:pPr marL="0" indent="0">
                         <a:buNone/>
                       </a:pPr>
                       <a:r>
@@ -2953,7 +2828,7 @@
                       </a:endParaRPr>
                     </a:p>
                   </a:txBody>
-                  <a:tcPr marL="91440" marR="91440" marT="45720" marB="45720" anchor="ctr">
+                  <a:tcPr anchor="ctr">
                     <a:lnL w="9525" cap="flat" cmpd="sng" algn="ctr">
                       <a:solidFill>
                         <a:srgbClr val="D5D9E0"/>
@@ -3000,7 +2875,7 @@
                     <a:bodyPr/>
                     <a:lstStyle/>
                     <a:p>
-                      <a:pPr indent="0" marL="0">
+                      <a:pPr marL="0" indent="0">
                         <a:buNone/>
                       </a:pPr>
                       <a:r>
@@ -3021,7 +2896,7 @@
                       </a:endParaRPr>
                     </a:p>
                   </a:txBody>
-                  <a:tcPr marL="91440" marR="91440" marT="45720" marB="45720" anchor="ctr">
+                  <a:tcPr anchor="ctr">
                     <a:lnL w="9525" cap="flat" cmpd="sng" algn="ctr">
                       <a:solidFill>
                         <a:srgbClr val="D5D9E0"/>
@@ -3060,6 +2935,11 @@
                     </a:lnB>
                   </a:tcPr>
                 </a:tc>
+                <a:extLst>
+                  <a:ext uri="{0D108BD9-81ED-4DB2-BD59-A6C34878D82A}">
+                    <a16:rowId xmlns:a16="http://schemas.microsoft.com/office/drawing/2014/main" val="10004"/>
+                  </a:ext>
+                </a:extLst>
               </a:tr>
               <a:tr h="502920">
                 <a:tc>
@@ -3067,7 +2947,7 @@
                     <a:bodyPr/>
                     <a:lstStyle/>
                     <a:p>
-                      <a:pPr indent="0" marL="0">
+                      <a:pPr marL="0" indent="0">
                         <a:buNone/>
                       </a:pPr>
                       <a:r>
@@ -3088,7 +2968,7 @@
                       </a:endParaRPr>
                     </a:p>
                   </a:txBody>
-                  <a:tcPr marL="91440" marR="91440" marT="45720" marB="45720" anchor="ctr">
+                  <a:tcPr anchor="ctr">
                     <a:lnL w="9525" cap="flat" cmpd="sng" algn="ctr">
                       <a:solidFill>
                         <a:srgbClr val="D5D9E0"/>
@@ -3135,7 +3015,7 @@
                     <a:bodyPr/>
                     <a:lstStyle/>
                     <a:p>
-                      <a:pPr indent="0" marL="0">
+                      <a:pPr marL="0" indent="0">
                         <a:buNone/>
                       </a:pPr>
                       <a:r>
@@ -3156,7 +3036,7 @@
                       </a:endParaRPr>
                     </a:p>
                   </a:txBody>
-                  <a:tcPr marL="91440" marR="91440" marT="45720" marB="45720" anchor="ctr">
+                  <a:tcPr anchor="ctr">
                     <a:lnL w="9525" cap="flat" cmpd="sng" algn="ctr">
                       <a:solidFill>
                         <a:srgbClr val="D5D9E0"/>
@@ -3203,7 +3083,7 @@
                     <a:bodyPr/>
                     <a:lstStyle/>
                     <a:p>
-                      <a:pPr indent="0" marL="0">
+                      <a:pPr marL="0" indent="0">
                         <a:buNone/>
                       </a:pPr>
                       <a:r>
@@ -3224,7 +3104,7 @@
                       </a:endParaRPr>
                     </a:p>
                   </a:txBody>
-                  <a:tcPr marL="91440" marR="91440" marT="45720" marB="45720" anchor="ctr">
+                  <a:tcPr anchor="ctr">
                     <a:lnL w="9525" cap="flat" cmpd="sng" algn="ctr">
                       <a:solidFill>
                         <a:srgbClr val="D5D9E0"/>
@@ -3263,6 +3143,11 @@
                     </a:lnB>
                   </a:tcPr>
                 </a:tc>
+                <a:extLst>
+                  <a:ext uri="{0D108BD9-81ED-4DB2-BD59-A6C34878D82A}">
+                    <a16:rowId xmlns:a16="http://schemas.microsoft.com/office/drawing/2014/main" val="10005"/>
+                  </a:ext>
+                </a:extLst>
               </a:tr>
               <a:tr h="502920">
                 <a:tc>
@@ -3270,7 +3155,7 @@
                     <a:bodyPr/>
                     <a:lstStyle/>
                     <a:p>
-                      <a:pPr indent="0" marL="0">
+                      <a:pPr marL="0" indent="0">
                         <a:buNone/>
                       </a:pPr>
                       <a:r>
@@ -3291,7 +3176,7 @@
                       </a:endParaRPr>
                     </a:p>
                   </a:txBody>
-                  <a:tcPr marL="91440" marR="91440" marT="45720" marB="45720" anchor="ctr">
+                  <a:tcPr anchor="ctr">
                     <a:lnL w="9525" cap="flat" cmpd="sng" algn="ctr">
                       <a:solidFill>
                         <a:srgbClr val="D5D9E0"/>
@@ -3338,7 +3223,7 @@
                     <a:bodyPr/>
                     <a:lstStyle/>
                     <a:p>
-                      <a:pPr indent="0" marL="0">
+                      <a:pPr marL="0" indent="0">
                         <a:buNone/>
                       </a:pPr>
                       <a:r>
@@ -3359,7 +3244,7 @@
                       </a:endParaRPr>
                     </a:p>
                   </a:txBody>
-                  <a:tcPr marL="91440" marR="91440" marT="45720" marB="45720" anchor="ctr">
+                  <a:tcPr anchor="ctr">
                     <a:lnL w="9525" cap="flat" cmpd="sng" algn="ctr">
                       <a:solidFill>
                         <a:srgbClr val="D5D9E0"/>
@@ -3406,7 +3291,7 @@
                     <a:bodyPr/>
                     <a:lstStyle/>
                     <a:p>
-                      <a:pPr indent="0" marL="0">
+                      <a:pPr marL="0" indent="0">
                         <a:buNone/>
                       </a:pPr>
                       <a:r>
@@ -3427,7 +3312,7 @@
                       </a:endParaRPr>
                     </a:p>
                   </a:txBody>
-                  <a:tcPr marL="91440" marR="91440" marT="45720" marB="45720" anchor="ctr">
+                  <a:tcPr anchor="ctr">
                     <a:lnL w="9525" cap="flat" cmpd="sng" algn="ctr">
                       <a:solidFill>
                         <a:srgbClr val="D5D9E0"/>
@@ -3466,6 +3351,11 @@
                     </a:lnB>
                   </a:tcPr>
                 </a:tc>
+                <a:extLst>
+                  <a:ext uri="{0D108BD9-81ED-4DB2-BD59-A6C34878D82A}">
+                    <a16:rowId xmlns:a16="http://schemas.microsoft.com/office/drawing/2014/main" val="10006"/>
+                  </a:ext>
+                </a:extLst>
               </a:tr>
               <a:tr h="502920">
                 <a:tc>
@@ -3473,7 +3363,7 @@
                     <a:bodyPr/>
                     <a:lstStyle/>
                     <a:p>
-                      <a:pPr indent="0" marL="0">
+                      <a:pPr marL="0" indent="0">
                         <a:buNone/>
                       </a:pPr>
                       <a:r>
@@ -3494,7 +3384,7 @@
                       </a:endParaRPr>
                     </a:p>
                   </a:txBody>
-                  <a:tcPr marL="91440" marR="91440" marT="45720" marB="45720" anchor="ctr">
+                  <a:tcPr anchor="ctr">
                     <a:lnL w="9525" cap="flat" cmpd="sng" algn="ctr">
                       <a:solidFill>
                         <a:srgbClr val="D5D9E0"/>
@@ -3541,7 +3431,7 @@
                     <a:bodyPr/>
                     <a:lstStyle/>
                     <a:p>
-                      <a:pPr indent="0" marL="0">
+                      <a:pPr marL="0" indent="0">
                         <a:buNone/>
                       </a:pPr>
                       <a:r>
@@ -3562,7 +3452,7 @@
                       </a:endParaRPr>
                     </a:p>
                   </a:txBody>
-                  <a:tcPr marL="91440" marR="91440" marT="45720" marB="45720" anchor="ctr">
+                  <a:tcPr anchor="ctr">
                     <a:lnL w="9525" cap="flat" cmpd="sng" algn="ctr">
                       <a:solidFill>
                         <a:srgbClr val="D5D9E0"/>
@@ -3609,7 +3499,7 @@
                     <a:bodyPr/>
                     <a:lstStyle/>
                     <a:p>
-                      <a:pPr indent="0" marL="0">
+                      <a:pPr marL="0" indent="0">
                         <a:buNone/>
                       </a:pPr>
                       <a:r>
@@ -3630,7 +3520,7 @@
                       </a:endParaRPr>
                     </a:p>
                   </a:txBody>
-                  <a:tcPr marL="91440" marR="91440" marT="45720" marB="45720" anchor="ctr">
+                  <a:tcPr anchor="ctr">
                     <a:lnL w="9525" cap="flat" cmpd="sng" algn="ctr">
                       <a:solidFill>
                         <a:srgbClr val="D5D9E0"/>
@@ -3669,6 +3559,11 @@
                     </a:lnB>
                   </a:tcPr>
                 </a:tc>
+                <a:extLst>
+                  <a:ext uri="{0D108BD9-81ED-4DB2-BD59-A6C34878D82A}">
+                    <a16:rowId xmlns:a16="http://schemas.microsoft.com/office/drawing/2014/main" val="10007"/>
+                  </a:ext>
+                </a:extLst>
               </a:tr>
             </a:tbl>
           </a:graphicData>
@@ -3690,6 +3585,7 @@
         <a:solidFill>
           <a:srgbClr val="FFFFFF"/>
         </a:solidFill>
+        <a:effectLst/>
       </p:bgPr>
     </p:bg>
     <p:spTree>
@@ -3727,7 +3623,7 @@
           <a:bodyPr wrap="square" lIns="0" tIns="0" rIns="0" bIns="0" rtlCol="0" anchor="ctr"/>
           <a:lstStyle/>
           <a:p>
-            <a:pPr indent="0" marL="0">
+            <a:pPr marL="0" indent="0">
               <a:buNone/>
             </a:pPr>
             <a:r>
@@ -3768,7 +3664,7 @@
           <a:bodyPr wrap="square" rtlCol="0" anchor="ctr"/>
           <a:lstStyle/>
           <a:p>
-            <a:pPr algn="ctr" indent="0" marL="0">
+            <a:pPr marL="0" indent="0" algn="ctr">
               <a:buNone/>
             </a:pPr>
             <a:r>
@@ -3802,16 +3698,34 @@
         </p:nvGraphicFramePr>
         <p:xfrm>
           <a:off x="457200" y="1051560"/>
-          <a:ext cx="8229600" cy="914400"/>
+          <a:ext cx="8229600" cy="3017520"/>
         </p:xfrm>
         <a:graphic>
           <a:graphicData uri="http://schemas.openxmlformats.org/drawingml/2006/table">
             <a:tbl>
               <a:tblPr/>
               <a:tblGrid>
-                <a:gridCol w="2743200"/>
-                <a:gridCol w="2834640"/>
-                <a:gridCol w="2651760"/>
+                <a:gridCol w="2743200">
+                  <a:extLst>
+                    <a:ext uri="{9D8B030D-6E8A-4147-A177-3AD203B41FA5}">
+                      <a16:colId xmlns:a16="http://schemas.microsoft.com/office/drawing/2014/main" val="20000"/>
+                    </a:ext>
+                  </a:extLst>
+                </a:gridCol>
+                <a:gridCol w="2834640">
+                  <a:extLst>
+                    <a:ext uri="{9D8B030D-6E8A-4147-A177-3AD203B41FA5}">
+                      <a16:colId xmlns:a16="http://schemas.microsoft.com/office/drawing/2014/main" val="20001"/>
+                    </a:ext>
+                  </a:extLst>
+                </a:gridCol>
+                <a:gridCol w="2651760">
+                  <a:extLst>
+                    <a:ext uri="{9D8B030D-6E8A-4147-A177-3AD203B41FA5}">
+                      <a16:colId xmlns:a16="http://schemas.microsoft.com/office/drawing/2014/main" val="20002"/>
+                    </a:ext>
+                  </a:extLst>
+                </a:gridCol>
               </a:tblGrid>
               <a:tr h="502920">
                 <a:tc>
@@ -3819,7 +3733,7 @@
                     <a:bodyPr/>
                     <a:lstStyle/>
                     <a:p>
-                      <a:pPr indent="0" marL="0">
+                      <a:pPr marL="0" indent="0">
                         <a:buNone/>
                       </a:pPr>
                       <a:r>
@@ -3840,7 +3754,7 @@
                       </a:endParaRPr>
                     </a:p>
                   </a:txBody>
-                  <a:tcPr marL="91440" marR="91440" marT="45720" marB="45720">
+                  <a:tcPr>
                     <a:lnL w="9525" cap="flat" cmpd="sng" algn="ctr">
                       <a:solidFill>
                         <a:srgbClr val="D5D9E0"/>
@@ -3887,7 +3801,7 @@
                     <a:bodyPr/>
                     <a:lstStyle/>
                     <a:p>
-                      <a:pPr indent="0" marL="0">
+                      <a:pPr marL="0" indent="0">
                         <a:buNone/>
                       </a:pPr>
                       <a:r>
@@ -3908,7 +3822,7 @@
                       </a:endParaRPr>
                     </a:p>
                   </a:txBody>
-                  <a:tcPr marL="91440" marR="91440" marT="45720" marB="45720">
+                  <a:tcPr>
                     <a:lnL w="9525" cap="flat" cmpd="sng" algn="ctr">
                       <a:solidFill>
                         <a:srgbClr val="D5D9E0"/>
@@ -3955,7 +3869,7 @@
                     <a:bodyPr/>
                     <a:lstStyle/>
                     <a:p>
-                      <a:pPr indent="0" marL="0">
+                      <a:pPr marL="0" indent="0">
                         <a:buNone/>
                       </a:pPr>
                       <a:r>
@@ -3976,7 +3890,7 @@
                       </a:endParaRPr>
                     </a:p>
                   </a:txBody>
-                  <a:tcPr marL="91440" marR="91440" marT="45720" marB="45720">
+                  <a:tcPr>
                     <a:lnL w="9525" cap="flat" cmpd="sng" algn="ctr">
                       <a:solidFill>
                         <a:srgbClr val="D5D9E0"/>
@@ -4018,6 +3932,11 @@
                     </a:solidFill>
                   </a:tcPr>
                 </a:tc>
+                <a:extLst>
+                  <a:ext uri="{0D108BD9-81ED-4DB2-BD59-A6C34878D82A}">
+                    <a16:rowId xmlns:a16="http://schemas.microsoft.com/office/drawing/2014/main" val="10000"/>
+                  </a:ext>
+                </a:extLst>
               </a:tr>
               <a:tr h="502920">
                 <a:tc>
@@ -4025,7 +3944,7 @@
                     <a:bodyPr/>
                     <a:lstStyle/>
                     <a:p>
-                      <a:pPr indent="0" marL="0">
+                      <a:pPr marL="0" indent="0">
                         <a:buNone/>
                       </a:pPr>
                       <a:r>
@@ -4046,7 +3965,7 @@
                       </a:endParaRPr>
                     </a:p>
                   </a:txBody>
-                  <a:tcPr marL="91440" marR="91440" marT="45720" marB="45720" anchor="ctr">
+                  <a:tcPr anchor="ctr">
                     <a:lnL w="9525" cap="flat" cmpd="sng" algn="ctr">
                       <a:solidFill>
                         <a:srgbClr val="D5D9E0"/>
@@ -4093,7 +4012,7 @@
                     <a:bodyPr/>
                     <a:lstStyle/>
                     <a:p>
-                      <a:pPr indent="0" marL="0">
+                      <a:pPr marL="0" indent="0">
                         <a:buNone/>
                       </a:pPr>
                       <a:r>
@@ -4114,7 +4033,7 @@
                       </a:endParaRPr>
                     </a:p>
                   </a:txBody>
-                  <a:tcPr marL="91440" marR="91440" marT="45720" marB="45720" anchor="ctr">
+                  <a:tcPr anchor="ctr">
                     <a:lnL w="9525" cap="flat" cmpd="sng" algn="ctr">
                       <a:solidFill>
                         <a:srgbClr val="D5D9E0"/>
@@ -4161,7 +4080,7 @@
                     <a:bodyPr/>
                     <a:lstStyle/>
                     <a:p>
-                      <a:pPr indent="0" marL="0">
+                      <a:pPr marL="0" indent="0">
                         <a:buNone/>
                       </a:pPr>
                       <a:r>
@@ -4182,7 +4101,7 @@
                       </a:endParaRPr>
                     </a:p>
                   </a:txBody>
-                  <a:tcPr marL="91440" marR="91440" marT="45720" marB="45720" anchor="ctr">
+                  <a:tcPr anchor="ctr">
                     <a:lnL w="9525" cap="flat" cmpd="sng" algn="ctr">
                       <a:solidFill>
                         <a:srgbClr val="D5D9E0"/>
@@ -4221,6 +4140,11 @@
                     </a:lnB>
                   </a:tcPr>
                 </a:tc>
+                <a:extLst>
+                  <a:ext uri="{0D108BD9-81ED-4DB2-BD59-A6C34878D82A}">
+                    <a16:rowId xmlns:a16="http://schemas.microsoft.com/office/drawing/2014/main" val="10001"/>
+                  </a:ext>
+                </a:extLst>
               </a:tr>
               <a:tr h="502920">
                 <a:tc>
@@ -4228,7 +4152,7 @@
                     <a:bodyPr/>
                     <a:lstStyle/>
                     <a:p>
-                      <a:pPr indent="0" marL="0">
+                      <a:pPr marL="0" indent="0">
                         <a:buNone/>
                       </a:pPr>
                       <a:r>
@@ -4249,7 +4173,7 @@
                       </a:endParaRPr>
                     </a:p>
                   </a:txBody>
-                  <a:tcPr marL="91440" marR="91440" marT="45720" marB="45720" anchor="ctr">
+                  <a:tcPr anchor="ctr">
                     <a:lnL w="9525" cap="flat" cmpd="sng" algn="ctr">
                       <a:solidFill>
                         <a:srgbClr val="D5D9E0"/>
@@ -4296,7 +4220,7 @@
                     <a:bodyPr/>
                     <a:lstStyle/>
                     <a:p>
-                      <a:pPr indent="0" marL="0">
+                      <a:pPr marL="0" indent="0">
                         <a:buNone/>
                       </a:pPr>
                       <a:r>
@@ -4317,7 +4241,7 @@
                       </a:endParaRPr>
                     </a:p>
                   </a:txBody>
-                  <a:tcPr marL="91440" marR="91440" marT="45720" marB="45720" anchor="ctr">
+                  <a:tcPr anchor="ctr">
                     <a:lnL w="9525" cap="flat" cmpd="sng" algn="ctr">
                       <a:solidFill>
                         <a:srgbClr val="D5D9E0"/>
@@ -4364,7 +4288,7 @@
                     <a:bodyPr/>
                     <a:lstStyle/>
                     <a:p>
-                      <a:pPr indent="0" marL="0">
+                      <a:pPr marL="0" indent="0">
                         <a:buNone/>
                       </a:pPr>
                       <a:r>
@@ -4385,7 +4309,7 @@
                       </a:endParaRPr>
                     </a:p>
                   </a:txBody>
-                  <a:tcPr marL="91440" marR="91440" marT="45720" marB="45720" anchor="ctr">
+                  <a:tcPr anchor="ctr">
                     <a:lnL w="9525" cap="flat" cmpd="sng" algn="ctr">
                       <a:solidFill>
                         <a:srgbClr val="D5D9E0"/>
@@ -4424,6 +4348,11 @@
                     </a:lnB>
                   </a:tcPr>
                 </a:tc>
+                <a:extLst>
+                  <a:ext uri="{0D108BD9-81ED-4DB2-BD59-A6C34878D82A}">
+                    <a16:rowId xmlns:a16="http://schemas.microsoft.com/office/drawing/2014/main" val="10002"/>
+                  </a:ext>
+                </a:extLst>
               </a:tr>
               <a:tr h="502920">
                 <a:tc>
@@ -4431,7 +4360,7 @@
                     <a:bodyPr/>
                     <a:lstStyle/>
                     <a:p>
-                      <a:pPr indent="0" marL="0">
+                      <a:pPr marL="0" indent="0">
                         <a:buNone/>
                       </a:pPr>
                       <a:r>
@@ -4452,7 +4381,7 @@
                       </a:endParaRPr>
                     </a:p>
                   </a:txBody>
-                  <a:tcPr marL="91440" marR="91440" marT="45720" marB="45720" anchor="ctr">
+                  <a:tcPr anchor="ctr">
                     <a:lnL w="9525" cap="flat" cmpd="sng" algn="ctr">
                       <a:solidFill>
                         <a:srgbClr val="D5D9E0"/>
@@ -4499,7 +4428,7 @@
                     <a:bodyPr/>
                     <a:lstStyle/>
                     <a:p>
-                      <a:pPr indent="0" marL="0">
+                      <a:pPr marL="0" indent="0">
                         <a:buNone/>
                       </a:pPr>
                       <a:r>
@@ -4520,7 +4449,7 @@
                       </a:endParaRPr>
                     </a:p>
                   </a:txBody>
-                  <a:tcPr marL="91440" marR="91440" marT="45720" marB="45720" anchor="ctr">
+                  <a:tcPr anchor="ctr">
                     <a:lnL w="9525" cap="flat" cmpd="sng" algn="ctr">
                       <a:solidFill>
                         <a:srgbClr val="D5D9E0"/>
@@ -4567,7 +4496,7 @@
                     <a:bodyPr/>
                     <a:lstStyle/>
                     <a:p>
-                      <a:pPr indent="0" marL="0">
+                      <a:pPr marL="0" indent="0">
                         <a:buNone/>
                       </a:pPr>
                       <a:r>
@@ -4588,7 +4517,7 @@
                       </a:endParaRPr>
                     </a:p>
                   </a:txBody>
-                  <a:tcPr marL="91440" marR="91440" marT="45720" marB="45720" anchor="ctr">
+                  <a:tcPr anchor="ctr">
                     <a:lnL w="9525" cap="flat" cmpd="sng" algn="ctr">
                       <a:solidFill>
                         <a:srgbClr val="D5D9E0"/>
@@ -4627,6 +4556,11 @@
                     </a:lnB>
                   </a:tcPr>
                 </a:tc>
+                <a:extLst>
+                  <a:ext uri="{0D108BD9-81ED-4DB2-BD59-A6C34878D82A}">
+                    <a16:rowId xmlns:a16="http://schemas.microsoft.com/office/drawing/2014/main" val="10003"/>
+                  </a:ext>
+                </a:extLst>
               </a:tr>
               <a:tr h="502920">
                 <a:tc>
@@ -4634,7 +4568,7 @@
                     <a:bodyPr/>
                     <a:lstStyle/>
                     <a:p>
-                      <a:pPr indent="0" marL="0">
+                      <a:pPr marL="0" indent="0">
                         <a:buNone/>
                       </a:pPr>
                       <a:r>
@@ -4655,7 +4589,7 @@
                       </a:endParaRPr>
                     </a:p>
                   </a:txBody>
-                  <a:tcPr marL="91440" marR="91440" marT="45720" marB="45720" anchor="ctr">
+                  <a:tcPr anchor="ctr">
                     <a:lnL w="9525" cap="flat" cmpd="sng" algn="ctr">
                       <a:solidFill>
                         <a:srgbClr val="D5D9E0"/>
@@ -4702,7 +4636,7 @@
                     <a:bodyPr/>
                     <a:lstStyle/>
                     <a:p>
-                      <a:pPr indent="0" marL="0">
+                      <a:pPr marL="0" indent="0">
                         <a:buNone/>
                       </a:pPr>
                       <a:r>
@@ -4723,7 +4657,7 @@
                       </a:endParaRPr>
                     </a:p>
                   </a:txBody>
-                  <a:tcPr marL="91440" marR="91440" marT="45720" marB="45720" anchor="ctr">
+                  <a:tcPr anchor="ctr">
                     <a:lnL w="9525" cap="flat" cmpd="sng" algn="ctr">
                       <a:solidFill>
                         <a:srgbClr val="D5D9E0"/>
@@ -4770,7 +4704,7 @@
                     <a:bodyPr/>
                     <a:lstStyle/>
                     <a:p>
-                      <a:pPr indent="0" marL="0">
+                      <a:pPr marL="0" indent="0">
                         <a:buNone/>
                       </a:pPr>
                       <a:r>
@@ -4791,7 +4725,7 @@
                       </a:endParaRPr>
                     </a:p>
                   </a:txBody>
-                  <a:tcPr marL="91440" marR="91440" marT="45720" marB="45720" anchor="ctr">
+                  <a:tcPr anchor="ctr">
                     <a:lnL w="9525" cap="flat" cmpd="sng" algn="ctr">
                       <a:solidFill>
                         <a:srgbClr val="D5D9E0"/>
@@ -4830,6 +4764,11 @@
                     </a:lnB>
                   </a:tcPr>
                 </a:tc>
+                <a:extLst>
+                  <a:ext uri="{0D108BD9-81ED-4DB2-BD59-A6C34878D82A}">
+                    <a16:rowId xmlns:a16="http://schemas.microsoft.com/office/drawing/2014/main" val="10004"/>
+                  </a:ext>
+                </a:extLst>
               </a:tr>
               <a:tr h="502920">
                 <a:tc>
@@ -4837,7 +4776,7 @@
                     <a:bodyPr/>
                     <a:lstStyle/>
                     <a:p>
-                      <a:pPr indent="0" marL="0">
+                      <a:pPr marL="0" indent="0">
                         <a:buNone/>
                       </a:pPr>
                       <a:r>
@@ -4858,7 +4797,7 @@
                       </a:endParaRPr>
                     </a:p>
                   </a:txBody>
-                  <a:tcPr marL="91440" marR="91440" marT="45720" marB="45720" anchor="ctr">
+                  <a:tcPr anchor="ctr">
                     <a:lnL w="9525" cap="flat" cmpd="sng" algn="ctr">
                       <a:solidFill>
                         <a:srgbClr val="D5D9E0"/>
@@ -4905,7 +4844,7 @@
                     <a:bodyPr/>
                     <a:lstStyle/>
                     <a:p>
-                      <a:pPr indent="0" marL="0">
+                      <a:pPr marL="0" indent="0">
                         <a:buNone/>
                       </a:pPr>
                       <a:r>
@@ -4926,7 +4865,7 @@
                       </a:endParaRPr>
                     </a:p>
                   </a:txBody>
-                  <a:tcPr marL="91440" marR="91440" marT="45720" marB="45720" anchor="ctr">
+                  <a:tcPr anchor="ctr">
                     <a:lnL w="9525" cap="flat" cmpd="sng" algn="ctr">
                       <a:solidFill>
                         <a:srgbClr val="D5D9E0"/>
@@ -4973,7 +4912,7 @@
                     <a:bodyPr/>
                     <a:lstStyle/>
                     <a:p>
-                      <a:pPr indent="0" marL="0">
+                      <a:pPr marL="0" indent="0">
                         <a:buNone/>
                       </a:pPr>
                       <a:r>
@@ -4994,7 +4933,7 @@
                       </a:endParaRPr>
                     </a:p>
                   </a:txBody>
-                  <a:tcPr marL="91440" marR="91440" marT="45720" marB="45720" anchor="ctr">
+                  <a:tcPr anchor="ctr">
                     <a:lnL w="9525" cap="flat" cmpd="sng" algn="ctr">
                       <a:solidFill>
                         <a:srgbClr val="D5D9E0"/>
@@ -5033,6 +4972,11 @@
                     </a:lnB>
                   </a:tcPr>
                 </a:tc>
+                <a:extLst>
+                  <a:ext uri="{0D108BD9-81ED-4DB2-BD59-A6C34878D82A}">
+                    <a16:rowId xmlns:a16="http://schemas.microsoft.com/office/drawing/2014/main" val="10005"/>
+                  </a:ext>
+                </a:extLst>
               </a:tr>
             </a:tbl>
           </a:graphicData>
@@ -5059,7 +5003,7 @@
           <a:bodyPr wrap="square" lIns="0" tIns="0" rIns="0" bIns="0" rtlCol="0" anchor="ctr"/>
           <a:lstStyle/>
           <a:p>
-            <a:pPr indent="0" marL="0">
+            <a:pPr marL="0" indent="0">
               <a:buNone/>
             </a:pPr>
             <a:r>
@@ -5093,6 +5037,7 @@
         <a:solidFill>
           <a:srgbClr val="FFFFFF"/>
         </a:solidFill>
+        <a:effectLst/>
       </p:bgPr>
     </p:bg>
     <p:spTree>
@@ -5130,7 +5075,7 @@
           <a:bodyPr wrap="square" lIns="0" tIns="0" rIns="0" bIns="0" rtlCol="0" anchor="ctr"/>
           <a:lstStyle/>
           <a:p>
-            <a:pPr indent="0" marL="0">
+            <a:pPr marL="0" indent="0">
               <a:buNone/>
             </a:pPr>
             <a:r>
@@ -5171,7 +5116,7 @@
           <a:bodyPr wrap="square" rtlCol="0" anchor="ctr"/>
           <a:lstStyle/>
           <a:p>
-            <a:pPr algn="ctr" indent="0" marL="0">
+            <a:pPr marL="0" indent="0" algn="ctr">
               <a:buNone/>
             </a:pPr>
             <a:r>
@@ -5205,16 +5150,34 @@
         </p:nvGraphicFramePr>
         <p:xfrm>
           <a:off x="457200" y="1051560"/>
-          <a:ext cx="8229600" cy="914400"/>
+          <a:ext cx="8229600" cy="1508760"/>
         </p:xfrm>
         <a:graphic>
           <a:graphicData uri="http://schemas.openxmlformats.org/drawingml/2006/table">
             <a:tbl>
               <a:tblPr/>
               <a:tblGrid>
-                <a:gridCol w="2743200"/>
-                <a:gridCol w="2834640"/>
-                <a:gridCol w="2651760"/>
+                <a:gridCol w="2743200">
+                  <a:extLst>
+                    <a:ext uri="{9D8B030D-6E8A-4147-A177-3AD203B41FA5}">
+                      <a16:colId xmlns:a16="http://schemas.microsoft.com/office/drawing/2014/main" val="20000"/>
+                    </a:ext>
+                  </a:extLst>
+                </a:gridCol>
+                <a:gridCol w="2834640">
+                  <a:extLst>
+                    <a:ext uri="{9D8B030D-6E8A-4147-A177-3AD203B41FA5}">
+                      <a16:colId xmlns:a16="http://schemas.microsoft.com/office/drawing/2014/main" val="20001"/>
+                    </a:ext>
+                  </a:extLst>
+                </a:gridCol>
+                <a:gridCol w="2651760">
+                  <a:extLst>
+                    <a:ext uri="{9D8B030D-6E8A-4147-A177-3AD203B41FA5}">
+                      <a16:colId xmlns:a16="http://schemas.microsoft.com/office/drawing/2014/main" val="20002"/>
+                    </a:ext>
+                  </a:extLst>
+                </a:gridCol>
               </a:tblGrid>
               <a:tr h="502920">
                 <a:tc>
@@ -5222,7 +5185,7 @@
                     <a:bodyPr/>
                     <a:lstStyle/>
                     <a:p>
-                      <a:pPr indent="0" marL="0">
+                      <a:pPr marL="0" indent="0">
                         <a:buNone/>
                       </a:pPr>
                       <a:r>
@@ -5243,7 +5206,7 @@
                       </a:endParaRPr>
                     </a:p>
                   </a:txBody>
-                  <a:tcPr marL="91440" marR="91440" marT="45720" marB="45720">
+                  <a:tcPr>
                     <a:lnL w="9525" cap="flat" cmpd="sng" algn="ctr">
                       <a:solidFill>
                         <a:srgbClr val="D5D9E0"/>
@@ -5290,7 +5253,7 @@
                     <a:bodyPr/>
                     <a:lstStyle/>
                     <a:p>
-                      <a:pPr indent="0" marL="0">
+                      <a:pPr marL="0" indent="0">
                         <a:buNone/>
                       </a:pPr>
                       <a:r>
@@ -5311,7 +5274,7 @@
                       </a:endParaRPr>
                     </a:p>
                   </a:txBody>
-                  <a:tcPr marL="91440" marR="91440" marT="45720" marB="45720">
+                  <a:tcPr>
                     <a:lnL w="9525" cap="flat" cmpd="sng" algn="ctr">
                       <a:solidFill>
                         <a:srgbClr val="D5D9E0"/>
@@ -5358,7 +5321,7 @@
                     <a:bodyPr/>
                     <a:lstStyle/>
                     <a:p>
-                      <a:pPr indent="0" marL="0">
+                      <a:pPr marL="0" indent="0">
                         <a:buNone/>
                       </a:pPr>
                       <a:r>
@@ -5379,7 +5342,7 @@
                       </a:endParaRPr>
                     </a:p>
                   </a:txBody>
-                  <a:tcPr marL="91440" marR="91440" marT="45720" marB="45720">
+                  <a:tcPr>
                     <a:lnL w="9525" cap="flat" cmpd="sng" algn="ctr">
                       <a:solidFill>
                         <a:srgbClr val="D5D9E0"/>
@@ -5421,6 +5384,11 @@
                     </a:solidFill>
                   </a:tcPr>
                 </a:tc>
+                <a:extLst>
+                  <a:ext uri="{0D108BD9-81ED-4DB2-BD59-A6C34878D82A}">
+                    <a16:rowId xmlns:a16="http://schemas.microsoft.com/office/drawing/2014/main" val="10000"/>
+                  </a:ext>
+                </a:extLst>
               </a:tr>
               <a:tr h="502920">
                 <a:tc>
@@ -5428,7 +5396,7 @@
                     <a:bodyPr/>
                     <a:lstStyle/>
                     <a:p>
-                      <a:pPr indent="0" marL="0">
+                      <a:pPr marL="0" indent="0">
                         <a:buNone/>
                       </a:pPr>
                       <a:r>
@@ -5449,7 +5417,7 @@
                       </a:endParaRPr>
                     </a:p>
                   </a:txBody>
-                  <a:tcPr marL="91440" marR="91440" marT="45720" marB="45720" anchor="ctr">
+                  <a:tcPr anchor="ctr">
                     <a:lnL w="9525" cap="flat" cmpd="sng" algn="ctr">
                       <a:solidFill>
                         <a:srgbClr val="D5D9E0"/>
@@ -5496,7 +5464,7 @@
                     <a:bodyPr/>
                     <a:lstStyle/>
                     <a:p>
-                      <a:pPr indent="0" marL="0">
+                      <a:pPr marL="0" indent="0">
                         <a:buNone/>
                       </a:pPr>
                       <a:r>
@@ -5517,7 +5485,7 @@
                       </a:endParaRPr>
                     </a:p>
                   </a:txBody>
-                  <a:tcPr marL="91440" marR="91440" marT="45720" marB="45720" anchor="ctr">
+                  <a:tcPr anchor="ctr">
                     <a:lnL w="9525" cap="flat" cmpd="sng" algn="ctr">
                       <a:solidFill>
                         <a:srgbClr val="D5D9E0"/>
@@ -5564,7 +5532,7 @@
                     <a:bodyPr/>
                     <a:lstStyle/>
                     <a:p>
-                      <a:pPr indent="0" marL="0">
+                      <a:pPr marL="0" indent="0">
                         <a:buNone/>
                       </a:pPr>
                       <a:r>
@@ -5585,7 +5553,7 @@
                       </a:endParaRPr>
                     </a:p>
                   </a:txBody>
-                  <a:tcPr marL="91440" marR="91440" marT="45720" marB="45720" anchor="ctr">
+                  <a:tcPr anchor="ctr">
                     <a:lnL w="9525" cap="flat" cmpd="sng" algn="ctr">
                       <a:solidFill>
                         <a:srgbClr val="D5D9E0"/>
@@ -5624,6 +5592,11 @@
                     </a:lnB>
                   </a:tcPr>
                 </a:tc>
+                <a:extLst>
+                  <a:ext uri="{0D108BD9-81ED-4DB2-BD59-A6C34878D82A}">
+                    <a16:rowId xmlns:a16="http://schemas.microsoft.com/office/drawing/2014/main" val="10001"/>
+                  </a:ext>
+                </a:extLst>
               </a:tr>
               <a:tr h="502920">
                 <a:tc>
@@ -5631,7 +5604,7 @@
                     <a:bodyPr/>
                     <a:lstStyle/>
                     <a:p>
-                      <a:pPr indent="0" marL="0">
+                      <a:pPr marL="0" indent="0">
                         <a:buNone/>
                       </a:pPr>
                       <a:r>
@@ -5652,7 +5625,7 @@
                       </a:endParaRPr>
                     </a:p>
                   </a:txBody>
-                  <a:tcPr marL="91440" marR="91440" marT="45720" marB="45720" anchor="ctr">
+                  <a:tcPr anchor="ctr">
                     <a:lnL w="9525" cap="flat" cmpd="sng" algn="ctr">
                       <a:solidFill>
                         <a:srgbClr val="D5D9E0"/>
@@ -5699,7 +5672,7 @@
                     <a:bodyPr/>
                     <a:lstStyle/>
                     <a:p>
-                      <a:pPr indent="0" marL="0">
+                      <a:pPr marL="0" indent="0">
                         <a:buNone/>
                       </a:pPr>
                       <a:r>
@@ -5720,7 +5693,7 @@
                       </a:endParaRPr>
                     </a:p>
                   </a:txBody>
-                  <a:tcPr marL="91440" marR="91440" marT="45720" marB="45720" anchor="ctr">
+                  <a:tcPr anchor="ctr">
                     <a:lnL w="9525" cap="flat" cmpd="sng" algn="ctr">
                       <a:solidFill>
                         <a:srgbClr val="D5D9E0"/>
@@ -5767,7 +5740,7 @@
                     <a:bodyPr/>
                     <a:lstStyle/>
                     <a:p>
-                      <a:pPr indent="0" marL="0">
+                      <a:pPr marL="0" indent="0">
                         <a:buNone/>
                       </a:pPr>
                       <a:r>
@@ -5788,7 +5761,7 @@
                       </a:endParaRPr>
                     </a:p>
                   </a:txBody>
-                  <a:tcPr marL="91440" marR="91440" marT="45720" marB="45720" anchor="ctr">
+                  <a:tcPr anchor="ctr">
                     <a:lnL w="9525" cap="flat" cmpd="sng" algn="ctr">
                       <a:solidFill>
                         <a:srgbClr val="D5D9E0"/>
@@ -5827,6 +5800,11 @@
                     </a:lnB>
                   </a:tcPr>
                 </a:tc>
+                <a:extLst>
+                  <a:ext uri="{0D108BD9-81ED-4DB2-BD59-A6C34878D82A}">
+                    <a16:rowId xmlns:a16="http://schemas.microsoft.com/office/drawing/2014/main" val="10002"/>
+                  </a:ext>
+                </a:extLst>
               </a:tr>
             </a:tbl>
           </a:graphicData>
@@ -5834,7 +5812,7 @@
       </p:graphicFrame>
       <p:sp>
         <p:nvSpPr>
-          <p:cNvPr id="5" name="Text 2"/>
+          <p:cNvPr id="4" name="Text 2"/>
           <p:cNvSpPr txBox="1"/>
           <p:nvPr/>
         </p:nvSpPr>
@@ -5853,7 +5831,7 @@
           <a:bodyPr wrap="square" lIns="0" tIns="0" rIns="0" bIns="0" rtlCol="0" anchor="ctr"/>
           <a:lstStyle/>
           <a:p>
-            <a:pPr indent="0" marL="0">
+            <a:pPr marL="0" indent="0">
               <a:buNone/>
             </a:pPr>
             <a:r>
@@ -5887,6 +5865,7 @@
         <a:solidFill>
           <a:srgbClr val="FFFFFF"/>
         </a:solidFill>
+        <a:effectLst/>
       </p:bgPr>
     </p:bg>
     <p:spTree>
@@ -5924,7 +5903,7 @@
           <a:bodyPr wrap="square" lIns="0" tIns="0" rIns="0" bIns="0" rtlCol="0" anchor="ctr"/>
           <a:lstStyle/>
           <a:p>
-            <a:pPr indent="0" marL="0">
+            <a:pPr marL="0" indent="0">
               <a:buNone/>
             </a:pPr>
             <a:r>
@@ -5965,7 +5944,7 @@
           <a:bodyPr wrap="square" rtlCol="0" anchor="ctr"/>
           <a:lstStyle/>
           <a:p>
-            <a:pPr algn="ctr" indent="0" marL="0">
+            <a:pPr marL="0" indent="0" algn="ctr">
               <a:buNone/>
             </a:pPr>
             <a:r>
@@ -5999,16 +5978,34 @@
         </p:nvGraphicFramePr>
         <p:xfrm>
           <a:off x="457200" y="1051560"/>
-          <a:ext cx="8229600" cy="914400"/>
+          <a:ext cx="8229600" cy="2514600"/>
         </p:xfrm>
         <a:graphic>
           <a:graphicData uri="http://schemas.openxmlformats.org/drawingml/2006/table">
             <a:tbl>
               <a:tblPr/>
               <a:tblGrid>
-                <a:gridCol w="2743200"/>
-                <a:gridCol w="2834640"/>
-                <a:gridCol w="2651760"/>
+                <a:gridCol w="2743200">
+                  <a:extLst>
+                    <a:ext uri="{9D8B030D-6E8A-4147-A177-3AD203B41FA5}">
+                      <a16:colId xmlns:a16="http://schemas.microsoft.com/office/drawing/2014/main" val="20000"/>
+                    </a:ext>
+                  </a:extLst>
+                </a:gridCol>
+                <a:gridCol w="2834640">
+                  <a:extLst>
+                    <a:ext uri="{9D8B030D-6E8A-4147-A177-3AD203B41FA5}">
+                      <a16:colId xmlns:a16="http://schemas.microsoft.com/office/drawing/2014/main" val="20001"/>
+                    </a:ext>
+                  </a:extLst>
+                </a:gridCol>
+                <a:gridCol w="2651760">
+                  <a:extLst>
+                    <a:ext uri="{9D8B030D-6E8A-4147-A177-3AD203B41FA5}">
+                      <a16:colId xmlns:a16="http://schemas.microsoft.com/office/drawing/2014/main" val="20002"/>
+                    </a:ext>
+                  </a:extLst>
+                </a:gridCol>
               </a:tblGrid>
               <a:tr h="502920">
                 <a:tc>
@@ -6016,7 +6013,7 @@
                     <a:bodyPr/>
                     <a:lstStyle/>
                     <a:p>
-                      <a:pPr indent="0" marL="0">
+                      <a:pPr marL="0" indent="0">
                         <a:buNone/>
                       </a:pPr>
                       <a:r>
@@ -6037,7 +6034,7 @@
                       </a:endParaRPr>
                     </a:p>
                   </a:txBody>
-                  <a:tcPr marL="91440" marR="91440" marT="45720" marB="45720">
+                  <a:tcPr>
                     <a:lnL w="9525" cap="flat" cmpd="sng" algn="ctr">
                       <a:solidFill>
                         <a:srgbClr val="D5D9E0"/>
@@ -6084,7 +6081,7 @@
                     <a:bodyPr/>
                     <a:lstStyle/>
                     <a:p>
-                      <a:pPr indent="0" marL="0">
+                      <a:pPr marL="0" indent="0">
                         <a:buNone/>
                       </a:pPr>
                       <a:r>
@@ -6105,7 +6102,7 @@
                       </a:endParaRPr>
                     </a:p>
                   </a:txBody>
-                  <a:tcPr marL="91440" marR="91440" marT="45720" marB="45720">
+                  <a:tcPr>
                     <a:lnL w="9525" cap="flat" cmpd="sng" algn="ctr">
                       <a:solidFill>
                         <a:srgbClr val="D5D9E0"/>
@@ -6152,7 +6149,7 @@
                     <a:bodyPr/>
                     <a:lstStyle/>
                     <a:p>
-                      <a:pPr indent="0" marL="0">
+                      <a:pPr marL="0" indent="0">
                         <a:buNone/>
                       </a:pPr>
                       <a:r>
@@ -6173,7 +6170,7 @@
                       </a:endParaRPr>
                     </a:p>
                   </a:txBody>
-                  <a:tcPr marL="91440" marR="91440" marT="45720" marB="45720">
+                  <a:tcPr>
                     <a:lnL w="9525" cap="flat" cmpd="sng" algn="ctr">
                       <a:solidFill>
                         <a:srgbClr val="D5D9E0"/>
@@ -6215,6 +6212,11 @@
                     </a:solidFill>
                   </a:tcPr>
                 </a:tc>
+                <a:extLst>
+                  <a:ext uri="{0D108BD9-81ED-4DB2-BD59-A6C34878D82A}">
+                    <a16:rowId xmlns:a16="http://schemas.microsoft.com/office/drawing/2014/main" val="10000"/>
+                  </a:ext>
+                </a:extLst>
               </a:tr>
               <a:tr h="502920">
                 <a:tc>
@@ -6222,7 +6224,7 @@
                     <a:bodyPr/>
                     <a:lstStyle/>
                     <a:p>
-                      <a:pPr indent="0" marL="0">
+                      <a:pPr marL="0" indent="0">
                         <a:buNone/>
                       </a:pPr>
                       <a:r>
@@ -6243,7 +6245,7 @@
                       </a:endParaRPr>
                     </a:p>
                   </a:txBody>
-                  <a:tcPr marL="91440" marR="91440" marT="45720" marB="45720" anchor="ctr">
+                  <a:tcPr anchor="ctr">
                     <a:lnL w="9525" cap="flat" cmpd="sng" algn="ctr">
                       <a:solidFill>
                         <a:srgbClr val="D5D9E0"/>
@@ -6290,7 +6292,7 @@
                     <a:bodyPr/>
                     <a:lstStyle/>
                     <a:p>
-                      <a:pPr indent="0" marL="0">
+                      <a:pPr marL="0" indent="0">
                         <a:buNone/>
                       </a:pPr>
                       <a:r>
@@ -6311,7 +6313,7 @@
                       </a:endParaRPr>
                     </a:p>
                   </a:txBody>
-                  <a:tcPr marL="91440" marR="91440" marT="45720" marB="45720" anchor="ctr">
+                  <a:tcPr anchor="ctr">
                     <a:lnL w="9525" cap="flat" cmpd="sng" algn="ctr">
                       <a:solidFill>
                         <a:srgbClr val="D5D9E0"/>
@@ -6358,7 +6360,7 @@
                     <a:bodyPr/>
                     <a:lstStyle/>
                     <a:p>
-                      <a:pPr indent="0" marL="0">
+                      <a:pPr marL="0" indent="0">
                         <a:buNone/>
                       </a:pPr>
                       <a:r>
@@ -6379,7 +6381,7 @@
                       </a:endParaRPr>
                     </a:p>
                   </a:txBody>
-                  <a:tcPr marL="91440" marR="91440" marT="45720" marB="45720" anchor="ctr">
+                  <a:tcPr anchor="ctr">
                     <a:lnL w="9525" cap="flat" cmpd="sng" algn="ctr">
                       <a:solidFill>
                         <a:srgbClr val="D5D9E0"/>
@@ -6418,6 +6420,11 @@
                     </a:lnB>
                   </a:tcPr>
                 </a:tc>
+                <a:extLst>
+                  <a:ext uri="{0D108BD9-81ED-4DB2-BD59-A6C34878D82A}">
+                    <a16:rowId xmlns:a16="http://schemas.microsoft.com/office/drawing/2014/main" val="10001"/>
+                  </a:ext>
+                </a:extLst>
               </a:tr>
               <a:tr h="502920">
                 <a:tc>
@@ -6425,7 +6432,7 @@
                     <a:bodyPr/>
                     <a:lstStyle/>
                     <a:p>
-                      <a:pPr indent="0" marL="0">
+                      <a:pPr marL="0" indent="0">
                         <a:buNone/>
                       </a:pPr>
                       <a:r>
@@ -6446,7 +6453,7 @@
                       </a:endParaRPr>
                     </a:p>
                   </a:txBody>
-                  <a:tcPr marL="91440" marR="91440" marT="45720" marB="45720" anchor="ctr">
+                  <a:tcPr anchor="ctr">
                     <a:lnL w="9525" cap="flat" cmpd="sng" algn="ctr">
                       <a:solidFill>
                         <a:srgbClr val="D5D9E0"/>
@@ -6493,7 +6500,7 @@
                     <a:bodyPr/>
                     <a:lstStyle/>
                     <a:p>
-                      <a:pPr indent="0" marL="0">
+                      <a:pPr marL="0" indent="0">
                         <a:buNone/>
                       </a:pPr>
                       <a:r>
@@ -6514,7 +6521,7 @@
                       </a:endParaRPr>
                     </a:p>
                   </a:txBody>
-                  <a:tcPr marL="91440" marR="91440" marT="45720" marB="45720" anchor="ctr">
+                  <a:tcPr anchor="ctr">
                     <a:lnL w="9525" cap="flat" cmpd="sng" algn="ctr">
                       <a:solidFill>
                         <a:srgbClr val="D5D9E0"/>
@@ -6561,7 +6568,7 @@
                     <a:bodyPr/>
                     <a:lstStyle/>
                     <a:p>
-                      <a:pPr indent="0" marL="0">
+                      <a:pPr marL="0" indent="0">
                         <a:buNone/>
                       </a:pPr>
                       <a:r>
@@ -6582,7 +6589,7 @@
                       </a:endParaRPr>
                     </a:p>
                   </a:txBody>
-                  <a:tcPr marL="91440" marR="91440" marT="45720" marB="45720" anchor="ctr">
+                  <a:tcPr anchor="ctr">
                     <a:lnL w="9525" cap="flat" cmpd="sng" algn="ctr">
                       <a:solidFill>
                         <a:srgbClr val="D5D9E0"/>
@@ -6621,6 +6628,11 @@
                     </a:lnB>
                   </a:tcPr>
                 </a:tc>
+                <a:extLst>
+                  <a:ext uri="{0D108BD9-81ED-4DB2-BD59-A6C34878D82A}">
+                    <a16:rowId xmlns:a16="http://schemas.microsoft.com/office/drawing/2014/main" val="10002"/>
+                  </a:ext>
+                </a:extLst>
               </a:tr>
               <a:tr h="502920">
                 <a:tc>
@@ -6628,7 +6640,7 @@
                     <a:bodyPr/>
                     <a:lstStyle/>
                     <a:p>
-                      <a:pPr indent="0" marL="0">
+                      <a:pPr marL="0" indent="0">
                         <a:buNone/>
                       </a:pPr>
                       <a:r>
@@ -6649,7 +6661,7 @@
                       </a:endParaRPr>
                     </a:p>
                   </a:txBody>
-                  <a:tcPr marL="91440" marR="91440" marT="45720" marB="45720" anchor="ctr">
+                  <a:tcPr anchor="ctr">
                     <a:lnL w="9525" cap="flat" cmpd="sng" algn="ctr">
                       <a:solidFill>
                         <a:srgbClr val="D5D9E0"/>
@@ -6696,7 +6708,7 @@
                     <a:bodyPr/>
                     <a:lstStyle/>
                     <a:p>
-                      <a:pPr indent="0" marL="0">
+                      <a:pPr marL="0" indent="0">
                         <a:buNone/>
                       </a:pPr>
                       <a:r>
@@ -6717,7 +6729,7 @@
                       </a:endParaRPr>
                     </a:p>
                   </a:txBody>
-                  <a:tcPr marL="91440" marR="91440" marT="45720" marB="45720" anchor="ctr">
+                  <a:tcPr anchor="ctr">
                     <a:lnL w="9525" cap="flat" cmpd="sng" algn="ctr">
                       <a:solidFill>
                         <a:srgbClr val="D5D9E0"/>
@@ -6764,7 +6776,7 @@
                     <a:bodyPr/>
                     <a:lstStyle/>
                     <a:p>
-                      <a:pPr indent="0" marL="0">
+                      <a:pPr marL="0" indent="0">
                         <a:buNone/>
                       </a:pPr>
                       <a:r>
@@ -6785,7 +6797,7 @@
                       </a:endParaRPr>
                     </a:p>
                   </a:txBody>
-                  <a:tcPr marL="91440" marR="91440" marT="45720" marB="45720" anchor="ctr">
+                  <a:tcPr anchor="ctr">
                     <a:lnL w="9525" cap="flat" cmpd="sng" algn="ctr">
                       <a:solidFill>
                         <a:srgbClr val="D5D9E0"/>
@@ -6824,6 +6836,11 @@
                     </a:lnB>
                   </a:tcPr>
                 </a:tc>
+                <a:extLst>
+                  <a:ext uri="{0D108BD9-81ED-4DB2-BD59-A6C34878D82A}">
+                    <a16:rowId xmlns:a16="http://schemas.microsoft.com/office/drawing/2014/main" val="10003"/>
+                  </a:ext>
+                </a:extLst>
               </a:tr>
               <a:tr h="502920">
                 <a:tc>
@@ -6831,7 +6848,7 @@
                     <a:bodyPr/>
                     <a:lstStyle/>
                     <a:p>
-                      <a:pPr indent="0" marL="0">
+                      <a:pPr marL="0" indent="0">
                         <a:buNone/>
                       </a:pPr>
                       <a:r>
@@ -6852,7 +6869,7 @@
                       </a:endParaRPr>
                     </a:p>
                   </a:txBody>
-                  <a:tcPr marL="91440" marR="91440" marT="45720" marB="45720" anchor="ctr">
+                  <a:tcPr anchor="ctr">
                     <a:lnL w="9525" cap="flat" cmpd="sng" algn="ctr">
                       <a:solidFill>
                         <a:srgbClr val="D5D9E0"/>
@@ -6899,7 +6916,7 @@
                     <a:bodyPr/>
                     <a:lstStyle/>
                     <a:p>
-                      <a:pPr indent="0" marL="0">
+                      <a:pPr marL="0" indent="0">
                         <a:buNone/>
                       </a:pPr>
                       <a:r>
@@ -6920,7 +6937,7 @@
                       </a:endParaRPr>
                     </a:p>
                   </a:txBody>
-                  <a:tcPr marL="91440" marR="91440" marT="45720" marB="45720" anchor="ctr">
+                  <a:tcPr anchor="ctr">
                     <a:lnL w="9525" cap="flat" cmpd="sng" algn="ctr">
                       <a:solidFill>
                         <a:srgbClr val="D5D9E0"/>
@@ -6967,7 +6984,7 @@
                     <a:bodyPr/>
                     <a:lstStyle/>
                     <a:p>
-                      <a:pPr indent="0" marL="0">
+                      <a:pPr marL="0" indent="0">
                         <a:buNone/>
                       </a:pPr>
                       <a:r>
@@ -6988,7 +7005,7 @@
                       </a:endParaRPr>
                     </a:p>
                   </a:txBody>
-                  <a:tcPr marL="91440" marR="91440" marT="45720" marB="45720" anchor="ctr">
+                  <a:tcPr anchor="ctr">
                     <a:lnL w="9525" cap="flat" cmpd="sng" algn="ctr">
                       <a:solidFill>
                         <a:srgbClr val="D5D9E0"/>
@@ -7027,6 +7044,11 @@
                     </a:lnB>
                   </a:tcPr>
                 </a:tc>
+                <a:extLst>
+                  <a:ext uri="{0D108BD9-81ED-4DB2-BD59-A6C34878D82A}">
+                    <a16:rowId xmlns:a16="http://schemas.microsoft.com/office/drawing/2014/main" val="10004"/>
+                  </a:ext>
+                </a:extLst>
               </a:tr>
             </a:tbl>
           </a:graphicData>
@@ -7053,7 +7075,7 @@
           <a:bodyPr wrap="square" lIns="0" tIns="0" rIns="0" bIns="0" rtlCol="0" anchor="ctr"/>
           <a:lstStyle/>
           <a:p>
-            <a:pPr indent="0" marL="0">
+            <a:pPr marL="0" indent="0">
               <a:buNone/>
             </a:pPr>
             <a:r>
@@ -7087,6 +7109,7 @@
         <a:solidFill>
           <a:srgbClr val="FFFFFF"/>
         </a:solidFill>
+        <a:effectLst/>
       </p:bgPr>
     </p:bg>
     <p:spTree>
@@ -7124,7 +7147,7 @@
           <a:bodyPr wrap="square" lIns="0" tIns="0" rIns="0" bIns="0" rtlCol="0" anchor="ctr"/>
           <a:lstStyle/>
           <a:p>
-            <a:pPr indent="0" marL="0">
+            <a:pPr marL="0" indent="0">
               <a:buNone/>
             </a:pPr>
             <a:r>
@@ -7165,7 +7188,7 @@
           <a:bodyPr wrap="square" rtlCol="0" anchor="ctr"/>
           <a:lstStyle/>
           <a:p>
-            <a:pPr algn="ctr" indent="0" marL="0">
+            <a:pPr marL="0" indent="0" algn="ctr">
               <a:buNone/>
             </a:pPr>
             <a:r>
@@ -7199,16 +7222,34 @@
         </p:nvGraphicFramePr>
         <p:xfrm>
           <a:off x="457200" y="1051560"/>
-          <a:ext cx="8229600" cy="914400"/>
+          <a:ext cx="8229600" cy="2011680"/>
         </p:xfrm>
         <a:graphic>
           <a:graphicData uri="http://schemas.openxmlformats.org/drawingml/2006/table">
             <a:tbl>
               <a:tblPr/>
               <a:tblGrid>
-                <a:gridCol w="2743200"/>
-                <a:gridCol w="2834640"/>
-                <a:gridCol w="2651760"/>
+                <a:gridCol w="2743200">
+                  <a:extLst>
+                    <a:ext uri="{9D8B030D-6E8A-4147-A177-3AD203B41FA5}">
+                      <a16:colId xmlns:a16="http://schemas.microsoft.com/office/drawing/2014/main" val="20000"/>
+                    </a:ext>
+                  </a:extLst>
+                </a:gridCol>
+                <a:gridCol w="2834640">
+                  <a:extLst>
+                    <a:ext uri="{9D8B030D-6E8A-4147-A177-3AD203B41FA5}">
+                      <a16:colId xmlns:a16="http://schemas.microsoft.com/office/drawing/2014/main" val="20001"/>
+                    </a:ext>
+                  </a:extLst>
+                </a:gridCol>
+                <a:gridCol w="2651760">
+                  <a:extLst>
+                    <a:ext uri="{9D8B030D-6E8A-4147-A177-3AD203B41FA5}">
+                      <a16:colId xmlns:a16="http://schemas.microsoft.com/office/drawing/2014/main" val="20002"/>
+                    </a:ext>
+                  </a:extLst>
+                </a:gridCol>
               </a:tblGrid>
               <a:tr h="502920">
                 <a:tc>
@@ -7216,7 +7257,7 @@
                     <a:bodyPr/>
                     <a:lstStyle/>
                     <a:p>
-                      <a:pPr indent="0" marL="0">
+                      <a:pPr marL="0" indent="0">
                         <a:buNone/>
                       </a:pPr>
                       <a:r>
@@ -7237,7 +7278,7 @@
                       </a:endParaRPr>
                     </a:p>
                   </a:txBody>
-                  <a:tcPr marL="91440" marR="91440" marT="45720" marB="45720">
+                  <a:tcPr>
                     <a:lnL w="9525" cap="flat" cmpd="sng" algn="ctr">
                       <a:solidFill>
                         <a:srgbClr val="D5D9E0"/>
@@ -7284,7 +7325,7 @@
                     <a:bodyPr/>
                     <a:lstStyle/>
                     <a:p>
-                      <a:pPr indent="0" marL="0">
+                      <a:pPr marL="0" indent="0">
                         <a:buNone/>
                       </a:pPr>
                       <a:r>
@@ -7305,7 +7346,7 @@
                       </a:endParaRPr>
                     </a:p>
                   </a:txBody>
-                  <a:tcPr marL="91440" marR="91440" marT="45720" marB="45720">
+                  <a:tcPr>
                     <a:lnL w="9525" cap="flat" cmpd="sng" algn="ctr">
                       <a:solidFill>
                         <a:srgbClr val="D5D9E0"/>
@@ -7352,7 +7393,7 @@
                     <a:bodyPr/>
                     <a:lstStyle/>
                     <a:p>
-                      <a:pPr indent="0" marL="0">
+                      <a:pPr marL="0" indent="0">
                         <a:buNone/>
                       </a:pPr>
                       <a:r>
@@ -7373,7 +7414,7 @@
                       </a:endParaRPr>
                     </a:p>
                   </a:txBody>
-                  <a:tcPr marL="91440" marR="91440" marT="45720" marB="45720">
+                  <a:tcPr>
                     <a:lnL w="9525" cap="flat" cmpd="sng" algn="ctr">
                       <a:solidFill>
                         <a:srgbClr val="D5D9E0"/>
@@ -7415,6 +7456,11 @@
                     </a:solidFill>
                   </a:tcPr>
                 </a:tc>
+                <a:extLst>
+                  <a:ext uri="{0D108BD9-81ED-4DB2-BD59-A6C34878D82A}">
+                    <a16:rowId xmlns:a16="http://schemas.microsoft.com/office/drawing/2014/main" val="10000"/>
+                  </a:ext>
+                </a:extLst>
               </a:tr>
               <a:tr h="502920">
                 <a:tc>
@@ -7422,7 +7468,7 @@
                     <a:bodyPr/>
                     <a:lstStyle/>
                     <a:p>
-                      <a:pPr indent="0" marL="0">
+                      <a:pPr marL="0" indent="0">
                         <a:buNone/>
                       </a:pPr>
                       <a:r>
@@ -7443,7 +7489,7 @@
                       </a:endParaRPr>
                     </a:p>
                   </a:txBody>
-                  <a:tcPr marL="91440" marR="91440" marT="45720" marB="45720" anchor="ctr">
+                  <a:tcPr anchor="ctr">
                     <a:lnL w="9525" cap="flat" cmpd="sng" algn="ctr">
                       <a:solidFill>
                         <a:srgbClr val="D5D9E0"/>
@@ -7490,7 +7536,7 @@
                     <a:bodyPr/>
                     <a:lstStyle/>
                     <a:p>
-                      <a:pPr indent="0" marL="0">
+                      <a:pPr marL="0" indent="0">
                         <a:buNone/>
                       </a:pPr>
                       <a:r>
@@ -7511,7 +7557,7 @@
                       </a:endParaRPr>
                     </a:p>
                   </a:txBody>
-                  <a:tcPr marL="91440" marR="91440" marT="45720" marB="45720" anchor="ctr">
+                  <a:tcPr anchor="ctr">
                     <a:lnL w="9525" cap="flat" cmpd="sng" algn="ctr">
                       <a:solidFill>
                         <a:srgbClr val="D5D9E0"/>
@@ -7558,7 +7604,7 @@
                     <a:bodyPr/>
                     <a:lstStyle/>
                     <a:p>
-                      <a:pPr indent="0" marL="0">
+                      <a:pPr marL="0" indent="0">
                         <a:buNone/>
                       </a:pPr>
                       <a:r>
@@ -7579,7 +7625,7 @@
                       </a:endParaRPr>
                     </a:p>
                   </a:txBody>
-                  <a:tcPr marL="91440" marR="91440" marT="45720" marB="45720" anchor="ctr">
+                  <a:tcPr anchor="ctr">
                     <a:lnL w="9525" cap="flat" cmpd="sng" algn="ctr">
                       <a:solidFill>
                         <a:srgbClr val="D5D9E0"/>
@@ -7618,6 +7664,11 @@
                     </a:lnB>
                   </a:tcPr>
                 </a:tc>
+                <a:extLst>
+                  <a:ext uri="{0D108BD9-81ED-4DB2-BD59-A6C34878D82A}">
+                    <a16:rowId xmlns:a16="http://schemas.microsoft.com/office/drawing/2014/main" val="10001"/>
+                  </a:ext>
+                </a:extLst>
               </a:tr>
               <a:tr h="502920">
                 <a:tc>
@@ -7625,7 +7676,7 @@
                     <a:bodyPr/>
                     <a:lstStyle/>
                     <a:p>
-                      <a:pPr indent="0" marL="0">
+                      <a:pPr marL="0" indent="0">
                         <a:buNone/>
                       </a:pPr>
                       <a:r>
@@ -7646,7 +7697,7 @@
                       </a:endParaRPr>
                     </a:p>
                   </a:txBody>
-                  <a:tcPr marL="91440" marR="91440" marT="45720" marB="45720" anchor="ctr">
+                  <a:tcPr anchor="ctr">
                     <a:lnL w="9525" cap="flat" cmpd="sng" algn="ctr">
                       <a:solidFill>
                         <a:srgbClr val="D5D9E0"/>
@@ -7693,7 +7744,7 @@
                     <a:bodyPr/>
                     <a:lstStyle/>
                     <a:p>
-                      <a:pPr indent="0" marL="0">
+                      <a:pPr marL="0" indent="0">
                         <a:buNone/>
                       </a:pPr>
                       <a:r>
@@ -7714,7 +7765,7 @@
                       </a:endParaRPr>
                     </a:p>
                   </a:txBody>
-                  <a:tcPr marL="91440" marR="91440" marT="45720" marB="45720" anchor="ctr">
+                  <a:tcPr anchor="ctr">
                     <a:lnL w="9525" cap="flat" cmpd="sng" algn="ctr">
                       <a:solidFill>
                         <a:srgbClr val="D5D9E0"/>
@@ -7761,7 +7812,7 @@
                     <a:bodyPr/>
                     <a:lstStyle/>
                     <a:p>
-                      <a:pPr indent="0" marL="0">
+                      <a:pPr marL="0" indent="0">
                         <a:buNone/>
                       </a:pPr>
                       <a:r>
@@ -7782,7 +7833,7 @@
                       </a:endParaRPr>
                     </a:p>
                   </a:txBody>
-                  <a:tcPr marL="91440" marR="91440" marT="45720" marB="45720" anchor="ctr">
+                  <a:tcPr anchor="ctr">
                     <a:lnL w="9525" cap="flat" cmpd="sng" algn="ctr">
                       <a:solidFill>
                         <a:srgbClr val="D5D9E0"/>
@@ -7821,6 +7872,11 @@
                     </a:lnB>
                   </a:tcPr>
                 </a:tc>
+                <a:extLst>
+                  <a:ext uri="{0D108BD9-81ED-4DB2-BD59-A6C34878D82A}">
+                    <a16:rowId xmlns:a16="http://schemas.microsoft.com/office/drawing/2014/main" val="10002"/>
+                  </a:ext>
+                </a:extLst>
               </a:tr>
               <a:tr h="502920">
                 <a:tc>
@@ -7828,7 +7884,7 @@
                     <a:bodyPr/>
                     <a:lstStyle/>
                     <a:p>
-                      <a:pPr indent="0" marL="0">
+                      <a:pPr marL="0" indent="0">
                         <a:buNone/>
                       </a:pPr>
                       <a:r>
@@ -7849,7 +7905,7 @@
                       </a:endParaRPr>
                     </a:p>
                   </a:txBody>
-                  <a:tcPr marL="91440" marR="91440" marT="45720" marB="45720" anchor="ctr">
+                  <a:tcPr anchor="ctr">
                     <a:lnL w="9525" cap="flat" cmpd="sng" algn="ctr">
                       <a:solidFill>
                         <a:srgbClr val="D5D9E0"/>
@@ -7896,7 +7952,7 @@
                     <a:bodyPr/>
                     <a:lstStyle/>
                     <a:p>
-                      <a:pPr indent="0" marL="0">
+                      <a:pPr marL="0" indent="0">
                         <a:buNone/>
                       </a:pPr>
                       <a:r>
@@ -7917,7 +7973,7 @@
                       </a:endParaRPr>
                     </a:p>
                   </a:txBody>
-                  <a:tcPr marL="91440" marR="91440" marT="45720" marB="45720" anchor="ctr">
+                  <a:tcPr anchor="ctr">
                     <a:lnL w="9525" cap="flat" cmpd="sng" algn="ctr">
                       <a:solidFill>
                         <a:srgbClr val="D5D9E0"/>
@@ -7964,7 +8020,7 @@
                     <a:bodyPr/>
                     <a:lstStyle/>
                     <a:p>
-                      <a:pPr indent="0" marL="0">
+                      <a:pPr marL="0" indent="0">
                         <a:buNone/>
                       </a:pPr>
                       <a:r>
@@ -7985,7 +8041,7 @@
                       </a:endParaRPr>
                     </a:p>
                   </a:txBody>
-                  <a:tcPr marL="91440" marR="91440" marT="45720" marB="45720" anchor="ctr">
+                  <a:tcPr anchor="ctr">
                     <a:lnL w="9525" cap="flat" cmpd="sng" algn="ctr">
                       <a:solidFill>
                         <a:srgbClr val="D5D9E0"/>
@@ -8024,6 +8080,11 @@
                     </a:lnB>
                   </a:tcPr>
                 </a:tc>
+                <a:extLst>
+                  <a:ext uri="{0D108BD9-81ED-4DB2-BD59-A6C34878D82A}">
+                    <a16:rowId xmlns:a16="http://schemas.microsoft.com/office/drawing/2014/main" val="10003"/>
+                  </a:ext>
+                </a:extLst>
               </a:tr>
             </a:tbl>
           </a:graphicData>
@@ -8045,6 +8106,7 @@
         <a:solidFill>
           <a:srgbClr val="FFFFFF"/>
         </a:solidFill>
+        <a:effectLst/>
       </p:bgPr>
     </p:bg>
     <p:spTree>
@@ -8082,7 +8144,7 @@
           <a:bodyPr wrap="square" lIns="0" tIns="0" rIns="0" bIns="0" rtlCol="0" anchor="ctr"/>
           <a:lstStyle/>
           <a:p>
-            <a:pPr indent="0" marL="0">
+            <a:pPr marL="0" indent="0">
               <a:buNone/>
             </a:pPr>
             <a:r>
@@ -8123,7 +8185,7 @@
           <a:bodyPr wrap="square" rtlCol="0" anchor="ctr"/>
           <a:lstStyle/>
           <a:p>
-            <a:pPr algn="ctr" indent="0" marL="0">
+            <a:pPr marL="0" indent="0" algn="ctr">
               <a:buNone/>
             </a:pPr>
             <a:r>
@@ -8162,7 +8224,7 @@
           <a:bodyPr wrap="square" lIns="0" tIns="0" rIns="0" bIns="0" rtlCol="0" anchor="ctr"/>
           <a:lstStyle/>
           <a:p>
-            <a:pPr indent="0" marL="0">
+            <a:pPr marL="0" indent="0">
               <a:buNone/>
             </a:pPr>
             <a:r>
@@ -8207,7 +8269,7 @@
               </a:spcAft>
               <a:buSzPct val="100000"/>
               <a:buFont typeface="+mj-lt"/>
-              <a:buAutoNum type="arabicPeriod" startAt="1"/>
+              <a:buAutoNum type="arabicPeriod"/>
             </a:pPr>
             <a:r>
               <a:rPr lang="en-US" sz="1300" dirty="0">
@@ -8229,7 +8291,7 @@
               </a:spcAft>
               <a:buSzPct val="100000"/>
               <a:buFont typeface="+mj-lt"/>
-              <a:buAutoNum type="arabicPeriod" startAt="1"/>
+              <a:buAutoNum type="arabicPeriod"/>
             </a:pPr>
             <a:r>
               <a:rPr lang="en-US" sz="1300" dirty="0">
@@ -8251,7 +8313,7 @@
               </a:spcAft>
               <a:buSzPct val="100000"/>
               <a:buFont typeface="+mj-lt"/>
-              <a:buAutoNum type="arabicPeriod" startAt="1"/>
+              <a:buAutoNum type="arabicPeriod"/>
             </a:pPr>
             <a:r>
               <a:rPr lang="en-US" sz="1300" dirty="0">
@@ -8273,7 +8335,7 @@
               </a:spcAft>
               <a:buSzPct val="100000"/>
               <a:buFont typeface="+mj-lt"/>
-              <a:buAutoNum type="arabicPeriod" startAt="1"/>
+              <a:buAutoNum type="arabicPeriod"/>
             </a:pPr>
             <a:r>
               <a:rPr lang="en-US" sz="1300" dirty="0">
@@ -8295,7 +8357,7 @@
               </a:spcAft>
               <a:buSzPct val="100000"/>
               <a:buFont typeface="+mj-lt"/>
-              <a:buAutoNum type="arabicPeriod" startAt="1"/>
+              <a:buAutoNum type="arabicPeriod"/>
             </a:pPr>
             <a:r>
               <a:rPr lang="en-US" sz="1300" dirty="0">
@@ -8306,7 +8368,102 @@
                 <a:ea typeface="Arial" pitchFamily="34" charset="-122"/>
                 <a:cs typeface="Arial" pitchFamily="34" charset="-120"/>
               </a:rPr>
-              <a:t>Conferir: SELECT name FROM sys.tables</a:t>
+              <a:t>Conferir: SELECT name FROM </a:t>
+            </a:r>
+            <a:r>
+              <a:rPr lang="en-US" sz="1300" dirty="0" err="1">
+                <a:solidFill>
+                  <a:srgbClr val="222222"/>
+                </a:solidFill>
+                <a:latin typeface="Arial" pitchFamily="34" charset="0"/>
+                <a:ea typeface="Arial" pitchFamily="34" charset="-122"/>
+                <a:cs typeface="Arial" pitchFamily="34" charset="-120"/>
+              </a:rPr>
+              <a:t>sys.tables</a:t>
+            </a:r>
+            <a:r>
+              <a:rPr lang="en-US" sz="1300" dirty="0">
+                <a:solidFill>
+                  <a:srgbClr val="222222"/>
+                </a:solidFill>
+                <a:latin typeface="Arial" pitchFamily="34" charset="0"/>
+                <a:ea typeface="Arial" pitchFamily="34" charset="-122"/>
+                <a:cs typeface="Arial" pitchFamily="34" charset="-120"/>
+              </a:rPr>
+              <a:t>,</a:t>
+            </a:r>
+          </a:p>
+          <a:p>
+            <a:pPr algn="ctr">
+              <a:spcAft>
+                <a:spcPts val="600"/>
+              </a:spcAft>
+              <a:buSzPct val="100000"/>
+            </a:pPr>
+            <a:endParaRPr lang="en-US" sz="1300" dirty="0">
+              <a:solidFill>
+                <a:srgbClr val="222222"/>
+              </a:solidFill>
+              <a:latin typeface="Arial" pitchFamily="34" charset="0"/>
+              <a:cs typeface="Arial" pitchFamily="34" charset="-120"/>
+            </a:endParaRPr>
+          </a:p>
+          <a:p>
+            <a:pPr algn="ctr">
+              <a:spcAft>
+                <a:spcPts val="600"/>
+              </a:spcAft>
+              <a:buSzPct val="100000"/>
+            </a:pPr>
+            <a:r>
+              <a:rPr lang="en-US" sz="1300" dirty="0">
+                <a:solidFill>
+                  <a:srgbClr val="222222"/>
+                </a:solidFill>
+                <a:latin typeface="Arial" pitchFamily="34" charset="0"/>
+                <a:cs typeface="Arial" pitchFamily="34" charset="-120"/>
+              </a:rPr>
+              <a:t>(Extra: </a:t>
+            </a:r>
+            <a:r>
+              <a:rPr lang="en-US" sz="1300" dirty="0" err="1">
+                <a:solidFill>
+                  <a:srgbClr val="222222"/>
+                </a:solidFill>
+                <a:latin typeface="Arial" pitchFamily="34" charset="0"/>
+                <a:cs typeface="Arial" pitchFamily="34" charset="-120"/>
+              </a:rPr>
+              <a:t>Utilizar</a:t>
+            </a:r>
+            <a:r>
+              <a:rPr lang="en-US" sz="1300" dirty="0">
+                <a:solidFill>
+                  <a:srgbClr val="222222"/>
+                </a:solidFill>
+                <a:latin typeface="Arial" pitchFamily="34" charset="0"/>
+                <a:cs typeface="Arial" pitchFamily="34" charset="-120"/>
+              </a:rPr>
+              <a:t> </a:t>
+            </a:r>
+            <a:r>
+              <a:rPr lang="en-US" sz="1300" dirty="0" err="1">
+                <a:solidFill>
+                  <a:srgbClr val="222222"/>
+                </a:solidFill>
+                <a:latin typeface="Arial" pitchFamily="34" charset="0"/>
+                <a:cs typeface="Arial" pitchFamily="34" charset="-120"/>
+              </a:rPr>
+              <a:t>alguns</a:t>
+            </a:r>
+            <a:r>
+              <a:rPr lang="en-US" sz="1300" dirty="0">
+                <a:solidFill>
+                  <a:srgbClr val="222222"/>
+                </a:solidFill>
+                <a:latin typeface="Arial" pitchFamily="34" charset="0"/>
+                <a:cs typeface="Arial" pitchFamily="34" charset="-120"/>
+              </a:rPr>
+              <a:t> inserts para teste)</a:t>
             </a:r>
             <a:endParaRPr lang="en-US" sz="1300" dirty="0"/>
           </a:p>
@@ -8333,7 +8490,7 @@
           <a:bodyPr wrap="square" lIns="0" tIns="0" rIns="0" bIns="0" rtlCol="0" anchor="ctr"/>
           <a:lstStyle/>
           <a:p>
-            <a:pPr indent="0" marL="0">
+            <a:pPr marL="0" indent="0">
               <a:buNone/>
             </a:pPr>
             <a:r>
@@ -8367,15 +8524,27 @@
         </p:nvGraphicFramePr>
         <p:xfrm>
           <a:off x="4754880" y="1508760"/>
-          <a:ext cx="3931920" cy="914400"/>
+          <a:ext cx="3931920" cy="2389632"/>
         </p:xfrm>
         <a:graphic>
           <a:graphicData uri="http://schemas.openxmlformats.org/drawingml/2006/table">
             <a:tbl>
               <a:tblPr/>
               <a:tblGrid>
-                <a:gridCol w="1463040"/>
-                <a:gridCol w="2468880"/>
+                <a:gridCol w="1463040">
+                  <a:extLst>
+                    <a:ext uri="{9D8B030D-6E8A-4147-A177-3AD203B41FA5}">
+                      <a16:colId xmlns:a16="http://schemas.microsoft.com/office/drawing/2014/main" val="20000"/>
+                    </a:ext>
+                  </a:extLst>
+                </a:gridCol>
+                <a:gridCol w="2468880">
+                  <a:extLst>
+                    <a:ext uri="{9D8B030D-6E8A-4147-A177-3AD203B41FA5}">
+                      <a16:colId xmlns:a16="http://schemas.microsoft.com/office/drawing/2014/main" val="20001"/>
+                    </a:ext>
+                  </a:extLst>
+                </a:gridCol>
               </a:tblGrid>
               <a:tr h="384048">
                 <a:tc>
@@ -8383,7 +8552,7 @@
                     <a:bodyPr/>
                     <a:lstStyle/>
                     <a:p>
-                      <a:pPr indent="0" marL="0">
+                      <a:pPr marL="0" indent="0">
                         <a:buNone/>
                       </a:pPr>
                       <a:r>
@@ -8404,7 +8573,7 @@
                       </a:endParaRPr>
                     </a:p>
                   </a:txBody>
-                  <a:tcPr marL="91440" marR="91440" marT="45720" marB="45720" anchor="ctr">
+                  <a:tcPr anchor="ctr">
                     <a:lnL w="9525" cap="flat" cmpd="sng" algn="ctr">
                       <a:solidFill>
                         <a:srgbClr val="D5D9E0"/>
@@ -8448,7 +8617,7 @@
                     <a:bodyPr/>
                     <a:lstStyle/>
                     <a:p>
-                      <a:pPr indent="0" marL="0">
+                      <a:pPr marL="0" indent="0">
                         <a:buNone/>
                       </a:pPr>
                       <a:r>
@@ -8469,7 +8638,7 @@
                       </a:endParaRPr>
                     </a:p>
                   </a:txBody>
-                  <a:tcPr marL="91440" marR="91440" marT="45720" marB="45720" anchor="ctr">
+                  <a:tcPr anchor="ctr">
                     <a:lnL w="9525" cap="flat" cmpd="sng" algn="ctr">
                       <a:solidFill>
                         <a:srgbClr val="D5D9E0"/>
@@ -8508,6 +8677,11 @@
                     </a:lnB>
                   </a:tcPr>
                 </a:tc>
+                <a:extLst>
+                  <a:ext uri="{0D108BD9-81ED-4DB2-BD59-A6C34878D82A}">
+                    <a16:rowId xmlns:a16="http://schemas.microsoft.com/office/drawing/2014/main" val="10000"/>
+                  </a:ext>
+                </a:extLst>
               </a:tr>
               <a:tr h="384048">
                 <a:tc>
@@ -8515,7 +8689,7 @@
                     <a:bodyPr/>
                     <a:lstStyle/>
                     <a:p>
-                      <a:pPr indent="0" marL="0">
+                      <a:pPr marL="0" indent="0">
                         <a:buNone/>
                       </a:pPr>
                       <a:r>
@@ -8536,7 +8710,7 @@
                       </a:endParaRPr>
                     </a:p>
                   </a:txBody>
-                  <a:tcPr marL="91440" marR="91440" marT="45720" marB="45720" anchor="ctr">
+                  <a:tcPr anchor="ctr">
                     <a:lnL w="9525" cap="flat" cmpd="sng" algn="ctr">
                       <a:solidFill>
                         <a:srgbClr val="D5D9E0"/>
@@ -8580,7 +8754,7 @@
                     <a:bodyPr/>
                     <a:lstStyle/>
                     <a:p>
-                      <a:pPr indent="0" marL="0">
+                      <a:pPr marL="0" indent="0">
                         <a:buNone/>
                       </a:pPr>
                       <a:r>
@@ -8601,7 +8775,7 @@
                       </a:endParaRPr>
                     </a:p>
                   </a:txBody>
-                  <a:tcPr marL="91440" marR="91440" marT="45720" marB="45720" anchor="ctr">
+                  <a:tcPr anchor="ctr">
                     <a:lnL w="9525" cap="flat" cmpd="sng" algn="ctr">
                       <a:solidFill>
                         <a:srgbClr val="D5D9E0"/>
@@ -8640,6 +8814,11 @@
                     </a:lnB>
                   </a:tcPr>
                 </a:tc>
+                <a:extLst>
+                  <a:ext uri="{0D108BD9-81ED-4DB2-BD59-A6C34878D82A}">
+                    <a16:rowId xmlns:a16="http://schemas.microsoft.com/office/drawing/2014/main" val="10001"/>
+                  </a:ext>
+                </a:extLst>
               </a:tr>
               <a:tr h="384048">
                 <a:tc>
@@ -8647,7 +8826,7 @@
                     <a:bodyPr/>
                     <a:lstStyle/>
                     <a:p>
-                      <a:pPr indent="0" marL="0">
+                      <a:pPr marL="0" indent="0">
                         <a:buNone/>
                       </a:pPr>
                       <a:r>
@@ -8668,7 +8847,7 @@
                       </a:endParaRPr>
                     </a:p>
                   </a:txBody>
-                  <a:tcPr marL="91440" marR="91440" marT="45720" marB="45720" anchor="ctr">
+                  <a:tcPr anchor="ctr">
                     <a:lnL w="9525" cap="flat" cmpd="sng" algn="ctr">
                       <a:solidFill>
                         <a:srgbClr val="D5D9E0"/>
@@ -8712,7 +8891,7 @@
                     <a:bodyPr/>
                     <a:lstStyle/>
                     <a:p>
-                      <a:pPr indent="0" marL="0">
+                      <a:pPr marL="0" indent="0">
                         <a:buNone/>
                       </a:pPr>
                       <a:r>
@@ -8733,7 +8912,7 @@
                       </a:endParaRPr>
                     </a:p>
                   </a:txBody>
-                  <a:tcPr marL="91440" marR="91440" marT="45720" marB="45720" anchor="ctr">
+                  <a:tcPr anchor="ctr">
                     <a:lnL w="9525" cap="flat" cmpd="sng" algn="ctr">
                       <a:solidFill>
                         <a:srgbClr val="D5D9E0"/>
@@ -8772,6 +8951,11 @@
                     </a:lnB>
                   </a:tcPr>
                 </a:tc>
+                <a:extLst>
+                  <a:ext uri="{0D108BD9-81ED-4DB2-BD59-A6C34878D82A}">
+                    <a16:rowId xmlns:a16="http://schemas.microsoft.com/office/drawing/2014/main" val="10002"/>
+                  </a:ext>
+                </a:extLst>
               </a:tr>
               <a:tr h="384048">
                 <a:tc>
@@ -8779,7 +8963,7 @@
                     <a:bodyPr/>
                     <a:lstStyle/>
                     <a:p>
-                      <a:pPr indent="0" marL="0">
+                      <a:pPr marL="0" indent="0">
                         <a:buNone/>
                       </a:pPr>
                       <a:r>
@@ -8800,7 +8984,7 @@
                       </a:endParaRPr>
                     </a:p>
                   </a:txBody>
-                  <a:tcPr marL="91440" marR="91440" marT="45720" marB="45720" anchor="ctr">
+                  <a:tcPr anchor="ctr">
                     <a:lnL w="9525" cap="flat" cmpd="sng" algn="ctr">
                       <a:solidFill>
                         <a:srgbClr val="D5D9E0"/>
@@ -8844,7 +9028,7 @@
                     <a:bodyPr/>
                     <a:lstStyle/>
                     <a:p>
-                      <a:pPr indent="0" marL="0">
+                      <a:pPr marL="0" indent="0">
                         <a:buNone/>
                       </a:pPr>
                       <a:r>
@@ -8865,7 +9049,7 @@
                       </a:endParaRPr>
                     </a:p>
                   </a:txBody>
-                  <a:tcPr marL="91440" marR="91440" marT="45720" marB="45720" anchor="ctr">
+                  <a:tcPr anchor="ctr">
                     <a:lnL w="9525" cap="flat" cmpd="sng" algn="ctr">
                       <a:solidFill>
                         <a:srgbClr val="D5D9E0"/>
@@ -8904,6 +9088,11 @@
                     </a:lnB>
                   </a:tcPr>
                 </a:tc>
+                <a:extLst>
+                  <a:ext uri="{0D108BD9-81ED-4DB2-BD59-A6C34878D82A}">
+                    <a16:rowId xmlns:a16="http://schemas.microsoft.com/office/drawing/2014/main" val="10003"/>
+                  </a:ext>
+                </a:extLst>
               </a:tr>
               <a:tr h="384048">
                 <a:tc>
@@ -8911,7 +9100,7 @@
                     <a:bodyPr/>
                     <a:lstStyle/>
                     <a:p>
-                      <a:pPr indent="0" marL="0">
+                      <a:pPr marL="0" indent="0">
                         <a:buNone/>
                       </a:pPr>
                       <a:r>
@@ -8932,7 +9121,7 @@
                       </a:endParaRPr>
                     </a:p>
                   </a:txBody>
-                  <a:tcPr marL="91440" marR="91440" marT="45720" marB="45720" anchor="ctr">
+                  <a:tcPr anchor="ctr">
                     <a:lnL w="9525" cap="flat" cmpd="sng" algn="ctr">
                       <a:solidFill>
                         <a:srgbClr val="D5D9E0"/>
@@ -8976,7 +9165,7 @@
                     <a:bodyPr/>
                     <a:lstStyle/>
                     <a:p>
-                      <a:pPr indent="0" marL="0">
+                      <a:pPr marL="0" indent="0">
                         <a:buNone/>
                       </a:pPr>
                       <a:r>
@@ -8997,7 +9186,7 @@
                       </a:endParaRPr>
                     </a:p>
                   </a:txBody>
-                  <a:tcPr marL="91440" marR="91440" marT="45720" marB="45720" anchor="ctr">
+                  <a:tcPr anchor="ctr">
                     <a:lnL w="9525" cap="flat" cmpd="sng" algn="ctr">
                       <a:solidFill>
                         <a:srgbClr val="D5D9E0"/>
@@ -9036,6 +9225,11 @@
                     </a:lnB>
                   </a:tcPr>
                 </a:tc>
+                <a:extLst>
+                  <a:ext uri="{0D108BD9-81ED-4DB2-BD59-A6C34878D82A}">
+                    <a16:rowId xmlns:a16="http://schemas.microsoft.com/office/drawing/2014/main" val="10004"/>
+                  </a:ext>
+                </a:extLst>
               </a:tr>
               <a:tr h="384048">
                 <a:tc>
@@ -9043,7 +9237,7 @@
                     <a:bodyPr/>
                     <a:lstStyle/>
                     <a:p>
-                      <a:pPr indent="0" marL="0">
+                      <a:pPr marL="0" indent="0">
                         <a:buNone/>
                       </a:pPr>
                       <a:r>
@@ -9064,7 +9258,7 @@
                       </a:endParaRPr>
                     </a:p>
                   </a:txBody>
-                  <a:tcPr marL="91440" marR="91440" marT="45720" marB="45720" anchor="ctr">
+                  <a:tcPr anchor="ctr">
                     <a:lnL w="9525" cap="flat" cmpd="sng" algn="ctr">
                       <a:solidFill>
                         <a:srgbClr val="D5D9E0"/>
@@ -9108,7 +9302,7 @@
                     <a:bodyPr/>
                     <a:lstStyle/>
                     <a:p>
-                      <a:pPr indent="0" marL="0">
+                      <a:pPr marL="0" indent="0">
                         <a:buNone/>
                       </a:pPr>
                       <a:r>
@@ -9129,7 +9323,7 @@
                       </a:endParaRPr>
                     </a:p>
                   </a:txBody>
-                  <a:tcPr marL="91440" marR="91440" marT="45720" marB="45720" anchor="ctr">
+                  <a:tcPr anchor="ctr">
                     <a:lnL w="9525" cap="flat" cmpd="sng" algn="ctr">
                       <a:solidFill>
                         <a:srgbClr val="D5D9E0"/>
@@ -9168,6 +9362,11 @@
                     </a:lnB>
                   </a:tcPr>
                 </a:tc>
+                <a:extLst>
+                  <a:ext uri="{0D108BD9-81ED-4DB2-BD59-A6C34878D82A}">
+                    <a16:rowId xmlns:a16="http://schemas.microsoft.com/office/drawing/2014/main" val="10005"/>
+                  </a:ext>
+                </a:extLst>
               </a:tr>
             </a:tbl>
           </a:graphicData>
@@ -9175,7 +9374,7 @@
       </p:graphicFrame>
       <p:sp>
         <p:nvSpPr>
-          <p:cNvPr id="8" name="Text 5"/>
+          <p:cNvPr id="7" name="Text 5"/>
           <p:cNvSpPr txBox="1"/>
           <p:nvPr/>
         </p:nvSpPr>
@@ -9196,7 +9395,7 @@
           <a:bodyPr wrap="square" rtlCol="0" anchor="ctr"/>
           <a:lstStyle/>
           <a:p>
-            <a:pPr algn="ctr" indent="0" marL="0">
+            <a:pPr marL="0" indent="0" algn="ctr">
               <a:buNone/>
             </a:pPr>
             <a:r>
@@ -9515,4 +9714,299 @@
     </a:ext>
   </a:extLst>
 </a:theme>
+</file>
+
+<file path=ppt/theme/theme2.xml><?xml version="1.0" encoding="utf-8"?>
+<a:theme xmlns:a="http://schemas.openxmlformats.org/drawingml/2006/main" name="Tema do Office">
+  <a:themeElements>
+    <a:clrScheme name="Office">
+      <a:dk1>
+        <a:sysClr val="windowText" lastClr="000000"/>
+      </a:dk1>
+      <a:lt1>
+        <a:sysClr val="window" lastClr="FFFFFF"/>
+      </a:lt1>
+      <a:dk2>
+        <a:srgbClr val="44546A"/>
+      </a:dk2>
+      <a:lt2>
+        <a:srgbClr val="E7E6E6"/>
+      </a:lt2>
+      <a:accent1>
+        <a:srgbClr val="4472C4"/>
+      </a:accent1>
+      <a:accent2>
+        <a:srgbClr val="ED7D31"/>
+      </a:accent2>
+      <a:accent3>
+        <a:srgbClr val="A5A5A5"/>
+      </a:accent3>
+      <a:accent4>
+        <a:srgbClr val="FFC000"/>
+      </a:accent4>
+      <a:accent5>
+        <a:srgbClr val="5B9BD5"/>
+      </a:accent5>
+      <a:accent6>
+        <a:srgbClr val="70AD47"/>
+      </a:accent6>
+      <a:hlink>
+        <a:srgbClr val="0563C1"/>
+      </a:hlink>
+      <a:folHlink>
+        <a:srgbClr val="954F72"/>
+      </a:folHlink>
+    </a:clrScheme>
+    <a:fontScheme name="Office">
+      <a:majorFont>
+        <a:latin typeface="Calibri Light" panose="020F0302020204030204"/>
+        <a:ea typeface=""/>
+        <a:cs typeface=""/>
+        <a:font script="Jpan" typeface="游ゴシック Light"/>
+        <a:font script="Hang" typeface="맑은 고딕"/>
+        <a:font script="Hans" typeface="等线 Light"/>
+        <a:font script="Hant" typeface="新細明體"/>
+        <a:font script="Arab" typeface="Times New Roman"/>
+        <a:font script="Hebr" typeface="Times New Roman"/>
+        <a:font script="Thai" typeface="Angsana New"/>
+        <a:font script="Ethi" typeface="Nyala"/>
+        <a:font script="Beng" typeface="Vrinda"/>
+        <a:font script="Gujr" typeface="Shruti"/>
+        <a:font script="Khmr" typeface="MoolBoran"/>
+        <a:font script="Knda" typeface="Tunga"/>
+        <a:font script="Guru" typeface="Raavi"/>
+        <a:font script="Cans" typeface="Euphemia"/>
+        <a:font script="Cher" typeface="Plantagenet Cherokee"/>
+        <a:font script="Yiii" typeface="Microsoft Yi Baiti"/>
+        <a:font script="Tibt" typeface="Microsoft Himalaya"/>
+        <a:font script="Thaa" typeface="MV Boli"/>
+        <a:font script="Deva" typeface="Mangal"/>
+        <a:font script="Telu" typeface="Gautami"/>
+        <a:font script="Taml" typeface="Latha"/>
+        <a:font script="Syrc" typeface="Estrangelo Edessa"/>
+        <a:font script="Orya" typeface="Kalinga"/>
+        <a:font script="Mlym" typeface="Kartika"/>
+        <a:font script="Laoo" typeface="DokChampa"/>
+        <a:font script="Sinh" typeface="Iskoola Pota"/>
+        <a:font script="Mong" typeface="Mongolian Baiti"/>
+        <a:font script="Viet" typeface="Times New Roman"/>
+        <a:font script="Uigh" typeface="Microsoft Uighur"/>
+        <a:font script="Geor" typeface="Sylfaen"/>
+        <a:font script="Armn" typeface="Arial"/>
+        <a:font script="Bugi" typeface="Leelawadee UI"/>
+        <a:font script="Bopo" typeface="Microsoft JhengHei"/>
+        <a:font script="Java" typeface="Javanese Text"/>
+        <a:font script="Lisu" typeface="Segoe UI"/>
+        <a:font script="Mymr" typeface="Myanmar Text"/>
+        <a:font script="Nkoo" typeface="Ebrima"/>
+        <a:font script="Olck" typeface="Nirmala UI"/>
+        <a:font script="Osma" typeface="Ebrima"/>
+        <a:font script="Phag" typeface="Phagspa"/>
+        <a:font script="Syrn" typeface="Estrangelo Edessa"/>
+        <a:font script="Syrj" typeface="Estrangelo Edessa"/>
+        <a:font script="Syre" typeface="Estrangelo Edessa"/>
+        <a:font script="Sora" typeface="Nirmala UI"/>
+        <a:font script="Tale" typeface="Microsoft Tai Le"/>
+        <a:font script="Talu" typeface="Microsoft New Tai Lue"/>
+        <a:font script="Tfng" typeface="Ebrima"/>
+      </a:majorFont>
+      <a:minorFont>
+        <a:latin typeface="Calibri" panose="020F0502020204030204"/>
+        <a:ea typeface=""/>
+        <a:cs typeface=""/>
+        <a:font script="Jpan" typeface="游ゴシック"/>
+        <a:font script="Hang" typeface="맑은 고딕"/>
+        <a:font script="Hans" typeface="等线"/>
+        <a:font script="Hant" typeface="新細明體"/>
+        <a:font script="Arab" typeface="Arial"/>
+        <a:font script="Hebr" typeface="Arial"/>
+        <a:font script="Thai" typeface="Cordia New"/>
+        <a:font script="Ethi" typeface="Nyala"/>
+        <a:font script="Beng" typeface="Vrinda"/>
+        <a:font script="Gujr" typeface="Shruti"/>
+        <a:font script="Khmr" typeface="DaunPenh"/>
+        <a:font script="Knda" typeface="Tunga"/>
+        <a:font script="Guru" typeface="Raavi"/>
+        <a:font script="Cans" typeface="Euphemia"/>
+        <a:font script="Cher" typeface="Plantagenet Cherokee"/>
+        <a:font script="Yiii" typeface="Microsoft Yi Baiti"/>
+        <a:font script="Tibt" typeface="Microsoft Himalaya"/>
+        <a:font script="Thaa" typeface="MV Boli"/>
+        <a:font script="Deva" typeface="Mangal"/>
+        <a:font script="Telu" typeface="Gautami"/>
+        <a:font script="Taml" typeface="Latha"/>
+        <a:font script="Syrc" typeface="Estrangelo Edessa"/>
+        <a:font script="Orya" typeface="Kalinga"/>
+        <a:font script="Mlym" typeface="Kartika"/>
+        <a:font script="Laoo" typeface="DokChampa"/>
+        <a:font script="Sinh" typeface="Iskoola Pota"/>
+        <a:font script="Mong" typeface="Mongolian Baiti"/>
+        <a:font script="Viet" typeface="Arial"/>
+        <a:font script="Uigh" typeface="Microsoft Uighur"/>
+        <a:font script="Geor" typeface="Sylfaen"/>
+        <a:font script="Armn" typeface="Arial"/>
+        <a:font script="Bugi" typeface="Leelawadee UI"/>
+        <a:font script="Bopo" typeface="Microsoft JhengHei"/>
+        <a:font script="Java" typeface="Javanese Text"/>
+        <a:font script="Lisu" typeface="Segoe UI"/>
+        <a:font script="Mymr" typeface="Myanmar Text"/>
+        <a:font script="Nkoo" typeface="Ebrima"/>
+        <a:font script="Olck" typeface="Nirmala UI"/>
+        <a:font script="Osma" typeface="Ebrima"/>
+        <a:font script="Phag" typeface="Phagspa"/>
+        <a:font script="Syrn" typeface="Estrangelo Edessa"/>
+        <a:font script="Syrj" typeface="Estrangelo Edessa"/>
+        <a:font script="Syre" typeface="Estrangelo Edessa"/>
+        <a:font script="Sora" typeface="Nirmala UI"/>
+        <a:font script="Tale" typeface="Microsoft Tai Le"/>
+        <a:font script="Talu" typeface="Microsoft New Tai Lue"/>
+        <a:font script="Tfng" typeface="Ebrima"/>
+      </a:minorFont>
+    </a:fontScheme>
+    <a:fmtScheme name="Office">
+      <a:fillStyleLst>
+        <a:solidFill>
+          <a:schemeClr val="phClr"/>
+        </a:solidFill>
+        <a:gradFill rotWithShape="1">
+          <a:gsLst>
+            <a:gs pos="0">
+              <a:schemeClr val="phClr">
+                <a:lumMod val="110000"/>
+                <a:satMod val="105000"/>
+                <a:tint val="67000"/>
+              </a:schemeClr>
+            </a:gs>
+            <a:gs pos="50000">
+              <a:schemeClr val="phClr">
+                <a:lumMod val="105000"/>
+                <a:satMod val="103000"/>
+                <a:tint val="73000"/>
+              </a:schemeClr>
+            </a:gs>
+            <a:gs pos="100000">
+              <a:schemeClr val="phClr">
+                <a:lumMod val="105000"/>
+                <a:satMod val="109000"/>
+                <a:tint val="81000"/>
+              </a:schemeClr>
+            </a:gs>
+          </a:gsLst>
+          <a:lin ang="5400000" scaled="0"/>
+        </a:gradFill>
+        <a:gradFill rotWithShape="1">
+          <a:gsLst>
+            <a:gs pos="0">
+              <a:schemeClr val="phClr">
+                <a:satMod val="103000"/>
+                <a:lumMod val="102000"/>
+                <a:tint val="94000"/>
+              </a:schemeClr>
+            </a:gs>
+            <a:gs pos="50000">
+              <a:schemeClr val="phClr">
+                <a:satMod val="110000"/>
+                <a:lumMod val="100000"/>
+                <a:shade val="100000"/>
+              </a:schemeClr>
+            </a:gs>
+            <a:gs pos="100000">
+              <a:schemeClr val="phClr">
+                <a:lumMod val="99000"/>
+                <a:satMod val="120000"/>
+                <a:shade val="78000"/>
+              </a:schemeClr>
+            </a:gs>
+          </a:gsLst>
+          <a:lin ang="5400000" scaled="0"/>
+        </a:gradFill>
+      </a:fillStyleLst>
+      <a:lnStyleLst>
+        <a:ln w="6350" cap="flat" cmpd="sng" algn="ctr">
+          <a:solidFill>
+            <a:schemeClr val="phClr"/>
+          </a:solidFill>
+          <a:prstDash val="solid"/>
+          <a:miter lim="800000"/>
+        </a:ln>
+        <a:ln w="12700" cap="flat" cmpd="sng" algn="ctr">
+          <a:solidFill>
+            <a:schemeClr val="phClr"/>
+          </a:solidFill>
+          <a:prstDash val="solid"/>
+          <a:miter lim="800000"/>
+        </a:ln>
+        <a:ln w="19050" cap="flat" cmpd="sng" algn="ctr">
+          <a:solidFill>
+            <a:schemeClr val="phClr"/>
+          </a:solidFill>
+          <a:prstDash val="solid"/>
+          <a:miter lim="800000"/>
+        </a:ln>
+      </a:lnStyleLst>
+      <a:effectStyleLst>
+        <a:effectStyle>
+          <a:effectLst/>
+        </a:effectStyle>
+        <a:effectStyle>
+          <a:effectLst/>
+        </a:effectStyle>
+        <a:effectStyle>
+          <a:effectLst>
+            <a:outerShdw blurRad="57150" dist="19050" dir="5400000" algn="ctr" rotWithShape="0">
+              <a:srgbClr val="000000">
+                <a:alpha val="63000"/>
+              </a:srgbClr>
+            </a:outerShdw>
+          </a:effectLst>
+        </a:effectStyle>
+      </a:effectStyleLst>
+      <a:bgFillStyleLst>
+        <a:solidFill>
+          <a:schemeClr val="phClr"/>
+        </a:solidFill>
+        <a:solidFill>
+          <a:schemeClr val="phClr">
+            <a:tint val="95000"/>
+            <a:satMod val="170000"/>
+          </a:schemeClr>
+        </a:solidFill>
+        <a:gradFill rotWithShape="1">
+          <a:gsLst>
+            <a:gs pos="0">
+              <a:schemeClr val="phClr">
+                <a:tint val="93000"/>
+                <a:satMod val="150000"/>
+                <a:shade val="98000"/>
+                <a:lumMod val="102000"/>
+              </a:schemeClr>
+            </a:gs>
+            <a:gs pos="50000">
+              <a:schemeClr val="phClr">
+                <a:tint val="98000"/>
+                <a:satMod val="130000"/>
+                <a:shade val="90000"/>
+                <a:lumMod val="103000"/>
+              </a:schemeClr>
+            </a:gs>
+            <a:gs pos="100000">
+              <a:schemeClr val="phClr">
+                <a:shade val="63000"/>
+                <a:satMod val="120000"/>
+              </a:schemeClr>
+            </a:gs>
+          </a:gsLst>
+          <a:lin ang="5400000" scaled="0"/>
+        </a:gradFill>
+      </a:bgFillStyleLst>
+    </a:fmtScheme>
+  </a:themeElements>
+  <a:objectDefaults/>
+  <a:extraClrSchemeLst/>
+  <a:extLst>
+    <a:ext uri="{05A4C25C-085E-4340-85A3-A5531E510DB2}">
+      <thm15:themeFamily xmlns:thm15="http://schemas.microsoft.com/office/thememl/2012/main" name="Office Theme" id="{62F939B6-93AF-4DB8-9C6B-D6C7DFDC589F}" vid="{4A3C46E8-61CC-4603-A589-7422A47A8E4A}"/>
+    </a:ext>
+  </a:extLst>
+</a:theme>
 </file>